--- a/slides/pptx/week07.pptx
+++ b/slides/pptx/week07.pptx
@@ -1480,7 +1480,7 @@
     <p:bg>
       <p:bgPr>
         <a:solidFill>
-          <a:srgbClr val="0E1726"/>
+          <a:srgbClr val="FFFFFF"/>
         </a:solidFill>
       </p:bgPr>
     </p:bg>
@@ -1498,38 +1498,9 @@
           <a:chExt cx="0" cy="0"/>
         </a:xfrm>
       </p:grpSpPr>
-      <p:sp>
-        <p:nvSpPr>
-          <p:cNvPr id="2" name="Shape 0"/>
-          <p:cNvSpPr/>
-          <p:nvPr/>
-        </p:nvSpPr>
-        <p:spPr>
-          <a:xfrm>
-            <a:off x="603504" y="411480"/>
-            <a:ext cx="1874520" cy="932688"/>
-          </a:xfrm>
-          <a:prstGeom prst="roundRect">
-            <a:avLst>
-              <a:gd name="adj" fmla="val 7843"/>
-            </a:avLst>
-          </a:prstGeom>
-          <a:solidFill>
-            <a:srgbClr val="FFFFFF"/>
-          </a:solidFill>
-          <a:ln/>
-          <a:effectLst>
-            <a:outerShdw sx="100000" sy="100000" kx="0" ky="0" algn="bl" rotWithShape="0" blurRad="101600" dist="38100" dir="5400000">
-              <a:srgbClr val="000000">
-                <a:alpha val="35000"/>
-              </a:srgbClr>
-            </a:outerShdw>
-          </a:effectLst>
-        </p:spPr>
-      </p:sp>
       <p:pic>
         <p:nvPicPr>
-          <p:cNvPr id="3" name="Image 0" descr="/Users/pop7/Library/CloudStorage/OneDrive-MonsterConnectCo.,Ltd/Lecture/KOSEN69 - software-security/slides/pptx/assets/logo-small.png">    </p:cNvPr>
+          <p:cNvPr id="2" name="Image 0" descr="/Users/pop7/Library/CloudStorage/OneDrive-MonsterConnectCo.,Ltd/Lecture/KOSEN69 - software-security/slides/pptx/assets/logo-small.png">    </p:cNvPr>
           <p:cNvPicPr>
             <a:picLocks noChangeAspect="1"/>
           </p:cNvPicPr>
@@ -1543,8 +1514,8 @@
         </p:blipFill>
         <p:spPr>
           <a:xfrm>
-            <a:off x="758952" y="566928"/>
-            <a:ext cx="1563624" cy="621792"/>
+            <a:off x="640080" y="502920"/>
+            <a:ext cx="1691640" cy="676656"/>
           </a:xfrm>
           <a:prstGeom prst="rect">
             <a:avLst/>
@@ -1553,7 +1524,7 @@
       </p:pic>
       <p:sp>
         <p:nvSpPr>
-          <p:cNvPr id="4" name="Text 1"/>
+          <p:cNvPr id="3" name="Text 0"/>
           <p:cNvSpPr/>
           <p:nvPr/>
         </p:nvSpPr>
@@ -1592,7 +1563,7 @@
       </p:sp>
       <p:sp>
         <p:nvSpPr>
-          <p:cNvPr id="5" name="Text 2"/>
+          <p:cNvPr id="4" name="Text 1"/>
           <p:cNvSpPr/>
           <p:nvPr/>
         </p:nvSpPr>
@@ -1620,7 +1591,7 @@
             <a:r>
               <a:rPr lang="en-US" sz="4000" b="1" dirty="0">
                 <a:solidFill>
-                  <a:srgbClr val="E6EDF3"/>
+                  <a:srgbClr val="1F2937"/>
                 </a:solidFill>
                 <a:latin typeface="Arial" pitchFamily="34" charset="0"/>
                 <a:ea typeface="Arial" pitchFamily="34" charset="-122"/>
@@ -1634,7 +1605,7 @@
       </p:sp>
       <p:sp>
         <p:nvSpPr>
-          <p:cNvPr id="6" name="Text 3"/>
+          <p:cNvPr id="5" name="Text 2"/>
           <p:cNvSpPr/>
           <p:nvPr/>
         </p:nvSpPr>
@@ -1659,7 +1630,7 @@
             <a:r>
               <a:rPr lang="en-US" sz="1400" dirty="0">
                 <a:solidFill>
-                  <a:srgbClr val="94A3B8"/>
+                  <a:srgbClr val="64748B"/>
                 </a:solidFill>
                 <a:latin typeface="Calibri" pitchFamily="34" charset="0"/>
                 <a:ea typeface="Calibri" pitchFamily="34" charset="-122"/>
@@ -1685,7 +1656,7 @@
     <p:bg>
       <p:bgPr>
         <a:solidFill>
-          <a:srgbClr val="0E1726"/>
+          <a:srgbClr val="FFFFFF"/>
         </a:solidFill>
       </p:bgPr>
     </p:bg>
@@ -1722,9 +1693,9 @@
           </a:solidFill>
           <a:ln/>
           <a:effectLst>
-            <a:outerShdw sx="100000" sy="100000" kx="0" ky="0" algn="bl" rotWithShape="0" blurRad="101600" dist="38100" dir="5400000">
+            <a:outerShdw sx="100000" sy="100000" kx="0" ky="0" algn="bl" rotWithShape="0" blurRad="76200" dist="25400" dir="5400000">
               <a:srgbClr val="000000">
-                <a:alpha val="35000"/>
+                <a:alpha val="12000"/>
               </a:srgbClr>
             </a:outerShdw>
           </a:effectLst>
@@ -1781,7 +1752,7 @@
             <a:r>
               <a:rPr lang="en-US" sz="2600" b="1" dirty="0">
                 <a:solidFill>
-                  <a:srgbClr val="E6EDF3"/>
+                  <a:srgbClr val="1F2937"/>
                 </a:solidFill>
                 <a:latin typeface="Arial" pitchFamily="34" charset="0"/>
                 <a:ea typeface="Arial" pitchFamily="34" charset="-122"/>
@@ -1810,13 +1781,13 @@
             </a:avLst>
           </a:prstGeom>
           <a:solidFill>
-            <a:srgbClr val="18243A"/>
+            <a:srgbClr val="F1F5F9"/>
           </a:solidFill>
           <a:ln/>
           <a:effectLst>
-            <a:outerShdw sx="100000" sy="100000" kx="0" ky="0" algn="bl" rotWithShape="0" blurRad="101600" dist="38100" dir="5400000">
+            <a:outerShdw sx="100000" sy="100000" kx="0" ky="0" algn="bl" rotWithShape="0" blurRad="76200" dist="25400" dir="5400000">
               <a:srgbClr val="000000">
-                <a:alpha val="35000"/>
+                <a:alpha val="12000"/>
               </a:srgbClr>
             </a:outerShdw>
           </a:effectLst>
@@ -1853,7 +1824,7 @@
             <a:r>
               <a:rPr lang="en-US" sz="1400" dirty="0">
                 <a:solidFill>
-                  <a:srgbClr val="E6EDF3"/>
+                  <a:srgbClr val="1F2937"/>
                 </a:solidFill>
                 <a:latin typeface="Calibri" pitchFamily="34" charset="0"/>
                 <a:ea typeface="Calibri" pitchFamily="34" charset="-122"/>
@@ -1874,7 +1845,7 @@
             <a:r>
               <a:rPr lang="en-US" sz="1400" dirty="0">
                 <a:solidFill>
-                  <a:srgbClr val="E6EDF3"/>
+                  <a:srgbClr val="1F2937"/>
                 </a:solidFill>
                 <a:latin typeface="Calibri" pitchFamily="34" charset="0"/>
                 <a:ea typeface="Calibri" pitchFamily="34" charset="-122"/>
@@ -1895,7 +1866,7 @@
             <a:r>
               <a:rPr lang="en-US" sz="1400" dirty="0">
                 <a:solidFill>
-                  <a:srgbClr val="E6EDF3"/>
+                  <a:srgbClr val="1F2937"/>
                 </a:solidFill>
                 <a:latin typeface="Calibri" pitchFamily="34" charset="0"/>
                 <a:ea typeface="Calibri" pitchFamily="34" charset="-122"/>
@@ -1916,7 +1887,7 @@
             <a:r>
               <a:rPr lang="en-US" sz="1400" dirty="0">
                 <a:solidFill>
-                  <a:srgbClr val="E6EDF3"/>
+                  <a:srgbClr val="1F2937"/>
                 </a:solidFill>
                 <a:latin typeface="Calibri" pitchFamily="34" charset="0"/>
                 <a:ea typeface="Calibri" pitchFamily="34" charset="-122"/>
@@ -1955,7 +1926,7 @@
             <a:r>
               <a:rPr lang="en-US" sz="900" dirty="0">
                 <a:solidFill>
-                  <a:srgbClr val="94A3B8"/>
+                  <a:srgbClr val="64748B"/>
                 </a:solidFill>
                 <a:latin typeface="Calibri" pitchFamily="34" charset="0"/>
                 <a:ea typeface="Calibri" pitchFamily="34" charset="-122"/>
@@ -1967,38 +1938,9 @@
           </a:p>
         </p:txBody>
       </p:sp>
-      <p:sp>
-        <p:nvSpPr>
-          <p:cNvPr id="8" name="Shape 5"/>
-          <p:cNvSpPr/>
-          <p:nvPr/>
-        </p:nvSpPr>
-        <p:spPr>
-          <a:xfrm>
-            <a:off x="7772400" y="4590288"/>
-            <a:ext cx="969264" cy="475488"/>
-          </a:xfrm>
-          <a:prstGeom prst="roundRect">
-            <a:avLst>
-              <a:gd name="adj" fmla="val 11538"/>
-            </a:avLst>
-          </a:prstGeom>
-          <a:solidFill>
-            <a:srgbClr val="FFFFFF"/>
-          </a:solidFill>
-          <a:ln/>
-          <a:effectLst>
-            <a:outerShdw sx="100000" sy="100000" kx="0" ky="0" algn="bl" rotWithShape="0" blurRad="101600" dist="38100" dir="5400000">
-              <a:srgbClr val="000000">
-                <a:alpha val="35000"/>
-              </a:srgbClr>
-            </a:outerShdw>
-          </a:effectLst>
-        </p:spPr>
-      </p:sp>
       <p:pic>
         <p:nvPicPr>
-          <p:cNvPr id="9" name="Image 1" descr="/Users/pop7/Library/CloudStorage/OneDrive-MonsterConnectCo.,Ltd/Lecture/KOSEN69 - software-security/slides/pptx/assets/logo-small.png">    </p:cNvPr>
+          <p:cNvPr id="8" name="Image 1" descr="/Users/pop7/Library/CloudStorage/OneDrive-MonsterConnectCo.,Ltd/Lecture/KOSEN69 - software-security/slides/pptx/assets/logo-small.png">    </p:cNvPr>
           <p:cNvPicPr>
             <a:picLocks noChangeAspect="1"/>
           </p:cNvPicPr>
@@ -2012,7 +1954,7 @@
         </p:blipFill>
         <p:spPr>
           <a:xfrm>
-            <a:off x="7872984" y="4681728"/>
+            <a:off x="7882128" y="4700016"/>
             <a:ext cx="768096" cy="356616"/>
           </a:xfrm>
           <a:prstGeom prst="rect">
@@ -2034,7 +1976,7 @@
     <p:bg>
       <p:bgPr>
         <a:solidFill>
-          <a:srgbClr val="0E1726"/>
+          <a:srgbClr val="FFFFFF"/>
         </a:solidFill>
       </p:bgPr>
     </p:bg>
@@ -2071,9 +2013,9 @@
           </a:solidFill>
           <a:ln/>
           <a:effectLst>
-            <a:outerShdw sx="100000" sy="100000" kx="0" ky="0" algn="bl" rotWithShape="0" blurRad="101600" dist="38100" dir="5400000">
+            <a:outerShdw sx="100000" sy="100000" kx="0" ky="0" algn="bl" rotWithShape="0" blurRad="76200" dist="25400" dir="5400000">
               <a:srgbClr val="000000">
-                <a:alpha val="35000"/>
+                <a:alpha val="12000"/>
               </a:srgbClr>
             </a:outerShdw>
           </a:effectLst>
@@ -2130,7 +2072,7 @@
             <a:r>
               <a:rPr lang="en-US" sz="2600" b="1" dirty="0">
                 <a:solidFill>
-                  <a:srgbClr val="E6EDF3"/>
+                  <a:srgbClr val="1F2937"/>
                 </a:solidFill>
                 <a:latin typeface="Arial" pitchFamily="34" charset="0"/>
                 <a:ea typeface="Arial" pitchFamily="34" charset="-122"/>
@@ -2192,7 +2134,7 @@
                   <a:tcPr marL="76200" marR="76200" marT="38100" marB="38100" anchor="ctr">
                     <a:lnL w="12700" cap="flat" cmpd="sng" algn="ctr">
                       <a:solidFill>
-                        <a:srgbClr val="0E1726"/>
+                        <a:srgbClr val="FFFFFF"/>
                       </a:solidFill>
                       <a:prstDash val="solid"/>
                       <a:round/>
@@ -2201,7 +2143,7 @@
                     </a:lnL>
                     <a:lnR w="12700" cap="flat" cmpd="sng" algn="ctr">
                       <a:solidFill>
-                        <a:srgbClr val="0E1726"/>
+                        <a:srgbClr val="FFFFFF"/>
                       </a:solidFill>
                       <a:prstDash val="solid"/>
                       <a:round/>
@@ -2210,7 +2152,7 @@
                     </a:lnR>
                     <a:lnT w="12700" cap="flat" cmpd="sng" algn="ctr">
                       <a:solidFill>
-                        <a:srgbClr val="0E1726"/>
+                        <a:srgbClr val="FFFFFF"/>
                       </a:solidFill>
                       <a:prstDash val="solid"/>
                       <a:round/>
@@ -2219,7 +2161,7 @@
                     </a:lnT>
                     <a:lnB w="12700" cap="flat" cmpd="sng" algn="ctr">
                       <a:solidFill>
-                        <a:srgbClr val="0E1726"/>
+                        <a:srgbClr val="FFFFFF"/>
                       </a:solidFill>
                       <a:prstDash val="solid"/>
                       <a:round/>
@@ -2253,7 +2195,7 @@
                   <a:tcPr marL="76200" marR="76200" marT="38100" marB="38100" anchor="ctr">
                     <a:lnL w="12700" cap="flat" cmpd="sng" algn="ctr">
                       <a:solidFill>
-                        <a:srgbClr val="0E1726"/>
+                        <a:srgbClr val="FFFFFF"/>
                       </a:solidFill>
                       <a:prstDash val="solid"/>
                       <a:round/>
@@ -2262,7 +2204,7 @@
                     </a:lnL>
                     <a:lnR w="12700" cap="flat" cmpd="sng" algn="ctr">
                       <a:solidFill>
-                        <a:srgbClr val="0E1726"/>
+                        <a:srgbClr val="FFFFFF"/>
                       </a:solidFill>
                       <a:prstDash val="solid"/>
                       <a:round/>
@@ -2271,7 +2213,7 @@
                     </a:lnR>
                     <a:lnT w="12700" cap="flat" cmpd="sng" algn="ctr">
                       <a:solidFill>
-                        <a:srgbClr val="0E1726"/>
+                        <a:srgbClr val="FFFFFF"/>
                       </a:solidFill>
                       <a:prstDash val="solid"/>
                       <a:round/>
@@ -2280,7 +2222,7 @@
                     </a:lnT>
                     <a:lnB w="12700" cap="flat" cmpd="sng" algn="ctr">
                       <a:solidFill>
-                        <a:srgbClr val="0E1726"/>
+                        <a:srgbClr val="FFFFFF"/>
                       </a:solidFill>
                       <a:prstDash val="solid"/>
                       <a:round/>
@@ -2314,7 +2256,7 @@
                   <a:tcPr marL="76200" marR="76200" marT="38100" marB="38100" anchor="ctr">
                     <a:lnL w="12700" cap="flat" cmpd="sng" algn="ctr">
                       <a:solidFill>
-                        <a:srgbClr val="0E1726"/>
+                        <a:srgbClr val="FFFFFF"/>
                       </a:solidFill>
                       <a:prstDash val="solid"/>
                       <a:round/>
@@ -2323,7 +2265,7 @@
                     </a:lnL>
                     <a:lnR w="12700" cap="flat" cmpd="sng" algn="ctr">
                       <a:solidFill>
-                        <a:srgbClr val="0E1726"/>
+                        <a:srgbClr val="FFFFFF"/>
                       </a:solidFill>
                       <a:prstDash val="solid"/>
                       <a:round/>
@@ -2332,7 +2274,7 @@
                     </a:lnR>
                     <a:lnT w="12700" cap="flat" cmpd="sng" algn="ctr">
                       <a:solidFill>
-                        <a:srgbClr val="0E1726"/>
+                        <a:srgbClr val="FFFFFF"/>
                       </a:solidFill>
                       <a:prstDash val="solid"/>
                       <a:round/>
@@ -2341,7 +2283,7 @@
                     </a:lnT>
                     <a:lnB w="12700" cap="flat" cmpd="sng" algn="ctr">
                       <a:solidFill>
-                        <a:srgbClr val="0E1726"/>
+                        <a:srgbClr val="FFFFFF"/>
                       </a:solidFill>
                       <a:prstDash val="solid"/>
                       <a:round/>
@@ -2366,7 +2308,7 @@
                       <a:r>
                         <a:rPr lang="en-US" sz="1200" dirty="0">
                           <a:solidFill>
-                            <a:srgbClr val="E6EDF3"/>
+                            <a:srgbClr val="1F2937"/>
                           </a:solidFill>
                         </a:rPr>
                         <a:t>1</a:t>
@@ -2377,7 +2319,7 @@
                   <a:tcPr marL="76200" marR="76200" marT="38100" marB="38100" anchor="ctr">
                     <a:lnL w="12700" cap="flat" cmpd="sng" algn="ctr">
                       <a:solidFill>
-                        <a:srgbClr val="0E1726"/>
+                        <a:srgbClr val="FFFFFF"/>
                       </a:solidFill>
                       <a:prstDash val="solid"/>
                       <a:round/>
@@ -2386,7 +2328,7 @@
                     </a:lnL>
                     <a:lnR w="12700" cap="flat" cmpd="sng" algn="ctr">
                       <a:solidFill>
-                        <a:srgbClr val="0E1726"/>
+                        <a:srgbClr val="FFFFFF"/>
                       </a:solidFill>
                       <a:prstDash val="solid"/>
                       <a:round/>
@@ -2395,7 +2337,7 @@
                     </a:lnR>
                     <a:lnT w="12700" cap="flat" cmpd="sng" algn="ctr">
                       <a:solidFill>
-                        <a:srgbClr val="0E1726"/>
+                        <a:srgbClr val="FFFFFF"/>
                       </a:solidFill>
                       <a:prstDash val="solid"/>
                       <a:round/>
@@ -2404,7 +2346,7 @@
                     </a:lnT>
                     <a:lnB w="12700" cap="flat" cmpd="sng" algn="ctr">
                       <a:solidFill>
-                        <a:srgbClr val="0E1726"/>
+                        <a:srgbClr val="FFFFFF"/>
                       </a:solidFill>
                       <a:prstDash val="solid"/>
                       <a:round/>
@@ -2412,7 +2354,7 @@
                       <a:tailEnd type="none" w="med" len="med"/>
                     </a:lnB>
                     <a:solidFill>
-                      <a:srgbClr val="18243A"/>
+                      <a:srgbClr val="F1F5F9"/>
                     </a:solidFill>
                   </a:tcPr>
                 </a:tc>
@@ -2427,7 +2369,7 @@
                       <a:r>
                         <a:rPr lang="en-US" sz="1200" dirty="0">
                           <a:solidFill>
-                            <a:srgbClr val="E6EDF3"/>
+                            <a:srgbClr val="1F2937"/>
                           </a:solidFill>
                         </a:rPr>
                         <a:t>Threat modeling</a:t>
@@ -2438,7 +2380,7 @@
                   <a:tcPr marL="76200" marR="76200" marT="38100" marB="38100" anchor="ctr">
                     <a:lnL w="12700" cap="flat" cmpd="sng" algn="ctr">
                       <a:solidFill>
-                        <a:srgbClr val="0E1726"/>
+                        <a:srgbClr val="FFFFFF"/>
                       </a:solidFill>
                       <a:prstDash val="solid"/>
                       <a:round/>
@@ -2447,7 +2389,7 @@
                     </a:lnL>
                     <a:lnR w="12700" cap="flat" cmpd="sng" algn="ctr">
                       <a:solidFill>
-                        <a:srgbClr val="0E1726"/>
+                        <a:srgbClr val="FFFFFF"/>
                       </a:solidFill>
                       <a:prstDash val="solid"/>
                       <a:round/>
@@ -2456,7 +2398,7 @@
                     </a:lnR>
                     <a:lnT w="12700" cap="flat" cmpd="sng" algn="ctr">
                       <a:solidFill>
-                        <a:srgbClr val="0E1726"/>
+                        <a:srgbClr val="FFFFFF"/>
                       </a:solidFill>
                       <a:prstDash val="solid"/>
                       <a:round/>
@@ -2465,7 +2407,7 @@
                     </a:lnT>
                     <a:lnB w="12700" cap="flat" cmpd="sng" algn="ctr">
                       <a:solidFill>
-                        <a:srgbClr val="0E1726"/>
+                        <a:srgbClr val="FFFFFF"/>
                       </a:solidFill>
                       <a:prstDash val="solid"/>
                       <a:round/>
@@ -2473,7 +2415,7 @@
                       <a:tailEnd type="none" w="med" len="med"/>
                     </a:lnB>
                     <a:solidFill>
-                      <a:srgbClr val="18243A"/>
+                      <a:srgbClr val="F1F5F9"/>
                     </a:solidFill>
                   </a:tcPr>
                 </a:tc>
@@ -2488,7 +2430,7 @@
                       <a:r>
                         <a:rPr lang="en-US" sz="1200" dirty="0">
                           <a:solidFill>
-                            <a:srgbClr val="E6EDF3"/>
+                            <a:srgbClr val="1F2937"/>
                           </a:solidFill>
                         </a:rPr>
                         <a:t>think like an attacker; STRIDE</a:t>
@@ -2499,7 +2441,7 @@
                   <a:tcPr marL="76200" marR="76200" marT="38100" marB="38100" anchor="ctr">
                     <a:lnL w="12700" cap="flat" cmpd="sng" algn="ctr">
                       <a:solidFill>
-                        <a:srgbClr val="0E1726"/>
+                        <a:srgbClr val="FFFFFF"/>
                       </a:solidFill>
                       <a:prstDash val="solid"/>
                       <a:round/>
@@ -2508,7 +2450,7 @@
                     </a:lnL>
                     <a:lnR w="12700" cap="flat" cmpd="sng" algn="ctr">
                       <a:solidFill>
-                        <a:srgbClr val="0E1726"/>
+                        <a:srgbClr val="FFFFFF"/>
                       </a:solidFill>
                       <a:prstDash val="solid"/>
                       <a:round/>
@@ -2517,7 +2459,7 @@
                     </a:lnR>
                     <a:lnT w="12700" cap="flat" cmpd="sng" algn="ctr">
                       <a:solidFill>
-                        <a:srgbClr val="0E1726"/>
+                        <a:srgbClr val="FFFFFF"/>
                       </a:solidFill>
                       <a:prstDash val="solid"/>
                       <a:round/>
@@ -2526,7 +2468,7 @@
                     </a:lnT>
                     <a:lnB w="12700" cap="flat" cmpd="sng" algn="ctr">
                       <a:solidFill>
-                        <a:srgbClr val="0E1726"/>
+                        <a:srgbClr val="FFFFFF"/>
                       </a:solidFill>
                       <a:prstDash val="solid"/>
                       <a:round/>
@@ -2534,7 +2476,7 @@
                       <a:tailEnd type="none" w="med" len="med"/>
                     </a:lnB>
                     <a:solidFill>
-                      <a:srgbClr val="18243A"/>
+                      <a:srgbClr val="F1F5F9"/>
                     </a:solidFill>
                   </a:tcPr>
                 </a:tc>
@@ -2551,7 +2493,7 @@
                       <a:r>
                         <a:rPr lang="en-US" sz="1200" dirty="0">
                           <a:solidFill>
-                            <a:srgbClr val="E6EDF3"/>
+                            <a:srgbClr val="1F2937"/>
                           </a:solidFill>
                         </a:rPr>
                         <a:t>2</a:t>
@@ -2562,7 +2504,7 @@
                   <a:tcPr marL="76200" marR="76200" marT="38100" marB="38100" anchor="ctr">
                     <a:lnL w="12700" cap="flat" cmpd="sng" algn="ctr">
                       <a:solidFill>
-                        <a:srgbClr val="0E1726"/>
+                        <a:srgbClr val="FFFFFF"/>
                       </a:solidFill>
                       <a:prstDash val="solid"/>
                       <a:round/>
@@ -2571,7 +2513,7 @@
                     </a:lnL>
                     <a:lnR w="12700" cap="flat" cmpd="sng" algn="ctr">
                       <a:solidFill>
-                        <a:srgbClr val="0E1726"/>
+                        <a:srgbClr val="FFFFFF"/>
                       </a:solidFill>
                       <a:prstDash val="solid"/>
                       <a:round/>
@@ -2580,7 +2522,7 @@
                     </a:lnR>
                     <a:lnT w="12700" cap="flat" cmpd="sng" algn="ctr">
                       <a:solidFill>
-                        <a:srgbClr val="0E1726"/>
+                        <a:srgbClr val="FFFFFF"/>
                       </a:solidFill>
                       <a:prstDash val="solid"/>
                       <a:round/>
@@ -2589,7 +2531,7 @@
                     </a:lnT>
                     <a:lnB w="12700" cap="flat" cmpd="sng" algn="ctr">
                       <a:solidFill>
-                        <a:srgbClr val="0E1726"/>
+                        <a:srgbClr val="FFFFFF"/>
                       </a:solidFill>
                       <a:prstDash val="solid"/>
                       <a:round/>
@@ -2597,7 +2539,7 @@
                       <a:tailEnd type="none" w="med" len="med"/>
                     </a:lnB>
                     <a:solidFill>
-                      <a:srgbClr val="1E2B45"/>
+                      <a:srgbClr val="E8EDF3"/>
                     </a:solidFill>
                   </a:tcPr>
                 </a:tc>
@@ -2612,7 +2554,7 @@
                       <a:r>
                         <a:rPr lang="en-US" sz="1200" dirty="0">
                           <a:solidFill>
-                            <a:srgbClr val="E6EDF3"/>
+                            <a:srgbClr val="1F2937"/>
                           </a:solidFill>
                         </a:rPr>
                         <a:t>SDLC &amp; tooling</a:t>
@@ -2623,7 +2565,7 @@
                   <a:tcPr marL="76200" marR="76200" marT="38100" marB="38100" anchor="ctr">
                     <a:lnL w="12700" cap="flat" cmpd="sng" algn="ctr">
                       <a:solidFill>
-                        <a:srgbClr val="0E1726"/>
+                        <a:srgbClr val="FFFFFF"/>
                       </a:solidFill>
                       <a:prstDash val="solid"/>
                       <a:round/>
@@ -2632,7 +2574,7 @@
                     </a:lnL>
                     <a:lnR w="12700" cap="flat" cmpd="sng" algn="ctr">
                       <a:solidFill>
-                        <a:srgbClr val="0E1726"/>
+                        <a:srgbClr val="FFFFFF"/>
                       </a:solidFill>
                       <a:prstDash val="solid"/>
                       <a:round/>
@@ -2641,7 +2583,7 @@
                     </a:lnR>
                     <a:lnT w="12700" cap="flat" cmpd="sng" algn="ctr">
                       <a:solidFill>
-                        <a:srgbClr val="0E1726"/>
+                        <a:srgbClr val="FFFFFF"/>
                       </a:solidFill>
                       <a:prstDash val="solid"/>
                       <a:round/>
@@ -2650,7 +2592,7 @@
                     </a:lnT>
                     <a:lnB w="12700" cap="flat" cmpd="sng" algn="ctr">
                       <a:solidFill>
-                        <a:srgbClr val="0E1726"/>
+                        <a:srgbClr val="FFFFFF"/>
                       </a:solidFill>
                       <a:prstDash val="solid"/>
                       <a:round/>
@@ -2658,7 +2600,7 @@
                       <a:tailEnd type="none" w="med" len="med"/>
                     </a:lnB>
                     <a:solidFill>
-                      <a:srgbClr val="1E2B45"/>
+                      <a:srgbClr val="E8EDF3"/>
                     </a:solidFill>
                   </a:tcPr>
                 </a:tc>
@@ -2673,7 +2615,7 @@
                       <a:r>
                         <a:rPr lang="en-US" sz="1200" dirty="0">
                           <a:solidFill>
-                            <a:srgbClr val="E6EDF3"/>
+                            <a:srgbClr val="1F2937"/>
                           </a:solidFill>
                         </a:rPr>
                         <a:t>SAST/DAST/SCA/fuzzing; shift left</a:t>
@@ -2684,7 +2626,7 @@
                   <a:tcPr marL="76200" marR="76200" marT="38100" marB="38100" anchor="ctr">
                     <a:lnL w="12700" cap="flat" cmpd="sng" algn="ctr">
                       <a:solidFill>
-                        <a:srgbClr val="0E1726"/>
+                        <a:srgbClr val="FFFFFF"/>
                       </a:solidFill>
                       <a:prstDash val="solid"/>
                       <a:round/>
@@ -2693,7 +2635,7 @@
                     </a:lnL>
                     <a:lnR w="12700" cap="flat" cmpd="sng" algn="ctr">
                       <a:solidFill>
-                        <a:srgbClr val="0E1726"/>
+                        <a:srgbClr val="FFFFFF"/>
                       </a:solidFill>
                       <a:prstDash val="solid"/>
                       <a:round/>
@@ -2702,7 +2644,7 @@
                     </a:lnR>
                     <a:lnT w="12700" cap="flat" cmpd="sng" algn="ctr">
                       <a:solidFill>
-                        <a:srgbClr val="0E1726"/>
+                        <a:srgbClr val="FFFFFF"/>
                       </a:solidFill>
                       <a:prstDash val="solid"/>
                       <a:round/>
@@ -2711,7 +2653,7 @@
                     </a:lnT>
                     <a:lnB w="12700" cap="flat" cmpd="sng" algn="ctr">
                       <a:solidFill>
-                        <a:srgbClr val="0E1726"/>
+                        <a:srgbClr val="FFFFFF"/>
                       </a:solidFill>
                       <a:prstDash val="solid"/>
                       <a:round/>
@@ -2719,7 +2661,7 @@
                       <a:tailEnd type="none" w="med" len="med"/>
                     </a:lnB>
                     <a:solidFill>
-                      <a:srgbClr val="1E2B45"/>
+                      <a:srgbClr val="E8EDF3"/>
                     </a:solidFill>
                   </a:tcPr>
                 </a:tc>
@@ -2736,7 +2678,7 @@
                       <a:r>
                         <a:rPr lang="en-US" sz="1200" dirty="0">
                           <a:solidFill>
-                            <a:srgbClr val="E6EDF3"/>
+                            <a:srgbClr val="1F2937"/>
                           </a:solidFill>
                         </a:rPr>
                         <a:t>3</a:t>
@@ -2747,7 +2689,7 @@
                   <a:tcPr marL="76200" marR="76200" marT="38100" marB="38100" anchor="ctr">
                     <a:lnL w="12700" cap="flat" cmpd="sng" algn="ctr">
                       <a:solidFill>
-                        <a:srgbClr val="0E1726"/>
+                        <a:srgbClr val="FFFFFF"/>
                       </a:solidFill>
                       <a:prstDash val="solid"/>
                       <a:round/>
@@ -2756,7 +2698,7 @@
                     </a:lnL>
                     <a:lnR w="12700" cap="flat" cmpd="sng" algn="ctr">
                       <a:solidFill>
-                        <a:srgbClr val="0E1726"/>
+                        <a:srgbClr val="FFFFFF"/>
                       </a:solidFill>
                       <a:prstDash val="solid"/>
                       <a:round/>
@@ -2765,7 +2707,7 @@
                     </a:lnR>
                     <a:lnT w="12700" cap="flat" cmpd="sng" algn="ctr">
                       <a:solidFill>
-                        <a:srgbClr val="0E1726"/>
+                        <a:srgbClr val="FFFFFF"/>
                       </a:solidFill>
                       <a:prstDash val="solid"/>
                       <a:round/>
@@ -2774,7 +2716,7 @@
                     </a:lnT>
                     <a:lnB w="12700" cap="flat" cmpd="sng" algn="ctr">
                       <a:solidFill>
-                        <a:srgbClr val="0E1726"/>
+                        <a:srgbClr val="FFFFFF"/>
                       </a:solidFill>
                       <a:prstDash val="solid"/>
                       <a:round/>
@@ -2782,7 +2724,7 @@
                       <a:tailEnd type="none" w="med" len="med"/>
                     </a:lnB>
                     <a:solidFill>
-                      <a:srgbClr val="18243A"/>
+                      <a:srgbClr val="F1F5F9"/>
                     </a:solidFill>
                   </a:tcPr>
                 </a:tc>
@@ -2797,7 +2739,7 @@
                       <a:r>
                         <a:rPr lang="en-US" sz="1200" dirty="0">
                           <a:solidFill>
-                            <a:srgbClr val="E6EDF3"/>
+                            <a:srgbClr val="1F2937"/>
                           </a:solidFill>
                         </a:rPr>
                         <a:t>Crypto</a:t>
@@ -2808,7 +2750,7 @@
                   <a:tcPr marL="76200" marR="76200" marT="38100" marB="38100" anchor="ctr">
                     <a:lnL w="12700" cap="flat" cmpd="sng" algn="ctr">
                       <a:solidFill>
-                        <a:srgbClr val="0E1726"/>
+                        <a:srgbClr val="FFFFFF"/>
                       </a:solidFill>
                       <a:prstDash val="solid"/>
                       <a:round/>
@@ -2817,7 +2759,7 @@
                     </a:lnL>
                     <a:lnR w="12700" cap="flat" cmpd="sng" algn="ctr">
                       <a:solidFill>
-                        <a:srgbClr val="0E1726"/>
+                        <a:srgbClr val="FFFFFF"/>
                       </a:solidFill>
                       <a:prstDash val="solid"/>
                       <a:round/>
@@ -2826,7 +2768,7 @@
                     </a:lnR>
                     <a:lnT w="12700" cap="flat" cmpd="sng" algn="ctr">
                       <a:solidFill>
-                        <a:srgbClr val="0E1726"/>
+                        <a:srgbClr val="FFFFFF"/>
                       </a:solidFill>
                       <a:prstDash val="solid"/>
                       <a:round/>
@@ -2835,7 +2777,7 @@
                     </a:lnT>
                     <a:lnB w="12700" cap="flat" cmpd="sng" algn="ctr">
                       <a:solidFill>
-                        <a:srgbClr val="0E1726"/>
+                        <a:srgbClr val="FFFFFF"/>
                       </a:solidFill>
                       <a:prstDash val="solid"/>
                       <a:round/>
@@ -2843,7 +2785,7 @@
                       <a:tailEnd type="none" w="med" len="med"/>
                     </a:lnB>
                     <a:solidFill>
-                      <a:srgbClr val="18243A"/>
+                      <a:srgbClr val="F1F5F9"/>
                     </a:solidFill>
                   </a:tcPr>
                 </a:tc>
@@ -2858,7 +2800,7 @@
                       <a:r>
                         <a:rPr lang="en-US" sz="1200" dirty="0">
                           <a:solidFill>
-                            <a:srgbClr val="E6EDF3"/>
+                            <a:srgbClr val="1F2937"/>
                           </a:solidFill>
                         </a:rPr>
                         <a:t>KDFs, AEAD; avoid ECB/MD5</a:t>
@@ -2869,7 +2811,7 @@
                   <a:tcPr marL="76200" marR="76200" marT="38100" marB="38100" anchor="ctr">
                     <a:lnL w="12700" cap="flat" cmpd="sng" algn="ctr">
                       <a:solidFill>
-                        <a:srgbClr val="0E1726"/>
+                        <a:srgbClr val="FFFFFF"/>
                       </a:solidFill>
                       <a:prstDash val="solid"/>
                       <a:round/>
@@ -2878,7 +2820,7 @@
                     </a:lnL>
                     <a:lnR w="12700" cap="flat" cmpd="sng" algn="ctr">
                       <a:solidFill>
-                        <a:srgbClr val="0E1726"/>
+                        <a:srgbClr val="FFFFFF"/>
                       </a:solidFill>
                       <a:prstDash val="solid"/>
                       <a:round/>
@@ -2887,7 +2829,7 @@
                     </a:lnR>
                     <a:lnT w="12700" cap="flat" cmpd="sng" algn="ctr">
                       <a:solidFill>
-                        <a:srgbClr val="0E1726"/>
+                        <a:srgbClr val="FFFFFF"/>
                       </a:solidFill>
                       <a:prstDash val="solid"/>
                       <a:round/>
@@ -2896,7 +2838,7 @@
                     </a:lnT>
                     <a:lnB w="12700" cap="flat" cmpd="sng" algn="ctr">
                       <a:solidFill>
-                        <a:srgbClr val="0E1726"/>
+                        <a:srgbClr val="FFFFFF"/>
                       </a:solidFill>
                       <a:prstDash val="solid"/>
                       <a:round/>
@@ -2904,7 +2846,7 @@
                       <a:tailEnd type="none" w="med" len="med"/>
                     </a:lnB>
                     <a:solidFill>
-                      <a:srgbClr val="18243A"/>
+                      <a:srgbClr val="F1F5F9"/>
                     </a:solidFill>
                   </a:tcPr>
                 </a:tc>
@@ -2921,7 +2863,7 @@
                       <a:r>
                         <a:rPr lang="en-US" sz="1200" dirty="0">
                           <a:solidFill>
-                            <a:srgbClr val="E6EDF3"/>
+                            <a:srgbClr val="1F2937"/>
                           </a:solidFill>
                         </a:rPr>
                         <a:t>4</a:t>
@@ -2932,7 +2874,7 @@
                   <a:tcPr marL="76200" marR="76200" marT="38100" marB="38100" anchor="ctr">
                     <a:lnL w="12700" cap="flat" cmpd="sng" algn="ctr">
                       <a:solidFill>
-                        <a:srgbClr val="0E1726"/>
+                        <a:srgbClr val="FFFFFF"/>
                       </a:solidFill>
                       <a:prstDash val="solid"/>
                       <a:round/>
@@ -2941,7 +2883,7 @@
                     </a:lnL>
                     <a:lnR w="12700" cap="flat" cmpd="sng" algn="ctr">
                       <a:solidFill>
-                        <a:srgbClr val="0E1726"/>
+                        <a:srgbClr val="FFFFFF"/>
                       </a:solidFill>
                       <a:prstDash val="solid"/>
                       <a:round/>
@@ -2950,7 +2892,7 @@
                     </a:lnR>
                     <a:lnT w="12700" cap="flat" cmpd="sng" algn="ctr">
                       <a:solidFill>
-                        <a:srgbClr val="0E1726"/>
+                        <a:srgbClr val="FFFFFF"/>
                       </a:solidFill>
                       <a:prstDash val="solid"/>
                       <a:round/>
@@ -2959,7 +2901,7 @@
                     </a:lnT>
                     <a:lnB w="12700" cap="flat" cmpd="sng" algn="ctr">
                       <a:solidFill>
-                        <a:srgbClr val="0E1726"/>
+                        <a:srgbClr val="FFFFFF"/>
                       </a:solidFill>
                       <a:prstDash val="solid"/>
                       <a:round/>
@@ -2967,7 +2909,7 @@
                       <a:tailEnd type="none" w="med" len="med"/>
                     </a:lnB>
                     <a:solidFill>
-                      <a:srgbClr val="1E2B45"/>
+                      <a:srgbClr val="E8EDF3"/>
                     </a:solidFill>
                   </a:tcPr>
                 </a:tc>
@@ -2982,7 +2924,7 @@
                       <a:r>
                         <a:rPr lang="en-US" sz="1200" dirty="0">
                           <a:solidFill>
-                            <a:srgbClr val="E6EDF3"/>
+                            <a:srgbClr val="1F2937"/>
                           </a:solidFill>
                         </a:rPr>
                         <a:t>Injection</a:t>
@@ -2993,7 +2935,7 @@
                   <a:tcPr marL="76200" marR="76200" marT="38100" marB="38100" anchor="ctr">
                     <a:lnL w="12700" cap="flat" cmpd="sng" algn="ctr">
                       <a:solidFill>
-                        <a:srgbClr val="0E1726"/>
+                        <a:srgbClr val="FFFFFF"/>
                       </a:solidFill>
                       <a:prstDash val="solid"/>
                       <a:round/>
@@ -3002,7 +2944,7 @@
                     </a:lnL>
                     <a:lnR w="12700" cap="flat" cmpd="sng" algn="ctr">
                       <a:solidFill>
-                        <a:srgbClr val="0E1726"/>
+                        <a:srgbClr val="FFFFFF"/>
                       </a:solidFill>
                       <a:prstDash val="solid"/>
                       <a:round/>
@@ -3011,7 +2953,7 @@
                     </a:lnR>
                     <a:lnT w="12700" cap="flat" cmpd="sng" algn="ctr">
                       <a:solidFill>
-                        <a:srgbClr val="0E1726"/>
+                        <a:srgbClr val="FFFFFF"/>
                       </a:solidFill>
                       <a:prstDash val="solid"/>
                       <a:round/>
@@ -3020,7 +2962,7 @@
                     </a:lnT>
                     <a:lnB w="12700" cap="flat" cmpd="sng" algn="ctr">
                       <a:solidFill>
-                        <a:srgbClr val="0E1726"/>
+                        <a:srgbClr val="FFFFFF"/>
                       </a:solidFill>
                       <a:prstDash val="solid"/>
                       <a:round/>
@@ -3028,7 +2970,7 @@
                       <a:tailEnd type="none" w="med" len="med"/>
                     </a:lnB>
                     <a:solidFill>
-                      <a:srgbClr val="1E2B45"/>
+                      <a:srgbClr val="E8EDF3"/>
                     </a:solidFill>
                   </a:tcPr>
                 </a:tc>
@@ -3043,7 +2985,7 @@
                       <a:r>
                         <a:rPr lang="en-US" sz="1200" dirty="0">
                           <a:solidFill>
-                            <a:srgbClr val="E6EDF3"/>
+                            <a:srgbClr val="1F2937"/>
                           </a:solidFill>
                         </a:rPr>
                         <a:t>data ≠ code; parameterize</a:t>
@@ -3054,7 +2996,7 @@
                   <a:tcPr marL="76200" marR="76200" marT="38100" marB="38100" anchor="ctr">
                     <a:lnL w="12700" cap="flat" cmpd="sng" algn="ctr">
                       <a:solidFill>
-                        <a:srgbClr val="0E1726"/>
+                        <a:srgbClr val="FFFFFF"/>
                       </a:solidFill>
                       <a:prstDash val="solid"/>
                       <a:round/>
@@ -3063,7 +3005,7 @@
                     </a:lnL>
                     <a:lnR w="12700" cap="flat" cmpd="sng" algn="ctr">
                       <a:solidFill>
-                        <a:srgbClr val="0E1726"/>
+                        <a:srgbClr val="FFFFFF"/>
                       </a:solidFill>
                       <a:prstDash val="solid"/>
                       <a:round/>
@@ -3072,7 +3014,7 @@
                     </a:lnR>
                     <a:lnT w="12700" cap="flat" cmpd="sng" algn="ctr">
                       <a:solidFill>
-                        <a:srgbClr val="0E1726"/>
+                        <a:srgbClr val="FFFFFF"/>
                       </a:solidFill>
                       <a:prstDash val="solid"/>
                       <a:round/>
@@ -3081,7 +3023,7 @@
                     </a:lnT>
                     <a:lnB w="12700" cap="flat" cmpd="sng" algn="ctr">
                       <a:solidFill>
-                        <a:srgbClr val="0E1726"/>
+                        <a:srgbClr val="FFFFFF"/>
                       </a:solidFill>
                       <a:prstDash val="solid"/>
                       <a:round/>
@@ -3089,7 +3031,7 @@
                       <a:tailEnd type="none" w="med" len="med"/>
                     </a:lnB>
                     <a:solidFill>
-                      <a:srgbClr val="1E2B45"/>
+                      <a:srgbClr val="E8EDF3"/>
                     </a:solidFill>
                   </a:tcPr>
                 </a:tc>
@@ -3106,7 +3048,7 @@
                       <a:r>
                         <a:rPr lang="en-US" sz="1200" dirty="0">
                           <a:solidFill>
-                            <a:srgbClr val="E6EDF3"/>
+                            <a:srgbClr val="1F2937"/>
                           </a:solidFill>
                         </a:rPr>
                         <a:t>5</a:t>
@@ -3117,7 +3059,7 @@
                   <a:tcPr marL="76200" marR="76200" marT="38100" marB="38100" anchor="ctr">
                     <a:lnL w="12700" cap="flat" cmpd="sng" algn="ctr">
                       <a:solidFill>
-                        <a:srgbClr val="0E1726"/>
+                        <a:srgbClr val="FFFFFF"/>
                       </a:solidFill>
                       <a:prstDash val="solid"/>
                       <a:round/>
@@ -3126,7 +3068,7 @@
                     </a:lnL>
                     <a:lnR w="12700" cap="flat" cmpd="sng" algn="ctr">
                       <a:solidFill>
-                        <a:srgbClr val="0E1726"/>
+                        <a:srgbClr val="FFFFFF"/>
                       </a:solidFill>
                       <a:prstDash val="solid"/>
                       <a:round/>
@@ -3135,7 +3077,7 @@
                     </a:lnR>
                     <a:lnT w="12700" cap="flat" cmpd="sng" algn="ctr">
                       <a:solidFill>
-                        <a:srgbClr val="0E1726"/>
+                        <a:srgbClr val="FFFFFF"/>
                       </a:solidFill>
                       <a:prstDash val="solid"/>
                       <a:round/>
@@ -3144,7 +3086,7 @@
                     </a:lnT>
                     <a:lnB w="12700" cap="flat" cmpd="sng" algn="ctr">
                       <a:solidFill>
-                        <a:srgbClr val="0E1726"/>
+                        <a:srgbClr val="FFFFFF"/>
                       </a:solidFill>
                       <a:prstDash val="solid"/>
                       <a:round/>
@@ -3152,7 +3094,7 @@
                       <a:tailEnd type="none" w="med" len="med"/>
                     </a:lnB>
                     <a:solidFill>
-                      <a:srgbClr val="18243A"/>
+                      <a:srgbClr val="F1F5F9"/>
                     </a:solidFill>
                   </a:tcPr>
                 </a:tc>
@@ -3167,7 +3109,7 @@
                       <a:r>
                         <a:rPr lang="en-US" sz="1200" dirty="0">
                           <a:solidFill>
-                            <a:srgbClr val="E6EDF3"/>
+                            <a:srgbClr val="1F2937"/>
                           </a:solidFill>
                         </a:rPr>
                         <a:t>XSS</a:t>
@@ -3178,7 +3120,7 @@
                   <a:tcPr marL="76200" marR="76200" marT="38100" marB="38100" anchor="ctr">
                     <a:lnL w="12700" cap="flat" cmpd="sng" algn="ctr">
                       <a:solidFill>
-                        <a:srgbClr val="0E1726"/>
+                        <a:srgbClr val="FFFFFF"/>
                       </a:solidFill>
                       <a:prstDash val="solid"/>
                       <a:round/>
@@ -3187,7 +3129,7 @@
                     </a:lnL>
                     <a:lnR w="12700" cap="flat" cmpd="sng" algn="ctr">
                       <a:solidFill>
-                        <a:srgbClr val="0E1726"/>
+                        <a:srgbClr val="FFFFFF"/>
                       </a:solidFill>
                       <a:prstDash val="solid"/>
                       <a:round/>
@@ -3196,7 +3138,7 @@
                     </a:lnR>
                     <a:lnT w="12700" cap="flat" cmpd="sng" algn="ctr">
                       <a:solidFill>
-                        <a:srgbClr val="0E1726"/>
+                        <a:srgbClr val="FFFFFF"/>
                       </a:solidFill>
                       <a:prstDash val="solid"/>
                       <a:round/>
@@ -3205,7 +3147,7 @@
                     </a:lnT>
                     <a:lnB w="12700" cap="flat" cmpd="sng" algn="ctr">
                       <a:solidFill>
-                        <a:srgbClr val="0E1726"/>
+                        <a:srgbClr val="FFFFFF"/>
                       </a:solidFill>
                       <a:prstDash val="solid"/>
                       <a:round/>
@@ -3213,7 +3155,7 @@
                       <a:tailEnd type="none" w="med" len="med"/>
                     </a:lnB>
                     <a:solidFill>
-                      <a:srgbClr val="18243A"/>
+                      <a:srgbClr val="F1F5F9"/>
                     </a:solidFill>
                   </a:tcPr>
                 </a:tc>
@@ -3228,7 +3170,7 @@
                       <a:r>
                         <a:rPr lang="en-US" sz="1200" dirty="0">
                           <a:solidFill>
-                            <a:srgbClr val="E6EDF3"/>
+                            <a:srgbClr val="1F2937"/>
                           </a:solidFill>
                         </a:rPr>
                         <a:t>encode per context; CSP</a:t>
@@ -3239,7 +3181,7 @@
                   <a:tcPr marL="76200" marR="76200" marT="38100" marB="38100" anchor="ctr">
                     <a:lnL w="12700" cap="flat" cmpd="sng" algn="ctr">
                       <a:solidFill>
-                        <a:srgbClr val="0E1726"/>
+                        <a:srgbClr val="FFFFFF"/>
                       </a:solidFill>
                       <a:prstDash val="solid"/>
                       <a:round/>
@@ -3248,7 +3190,7 @@
                     </a:lnL>
                     <a:lnR w="12700" cap="flat" cmpd="sng" algn="ctr">
                       <a:solidFill>
-                        <a:srgbClr val="0E1726"/>
+                        <a:srgbClr val="FFFFFF"/>
                       </a:solidFill>
                       <a:prstDash val="solid"/>
                       <a:round/>
@@ -3257,7 +3199,7 @@
                     </a:lnR>
                     <a:lnT w="12700" cap="flat" cmpd="sng" algn="ctr">
                       <a:solidFill>
-                        <a:srgbClr val="0E1726"/>
+                        <a:srgbClr val="FFFFFF"/>
                       </a:solidFill>
                       <a:prstDash val="solid"/>
                       <a:round/>
@@ -3266,7 +3208,7 @@
                     </a:lnT>
                     <a:lnB w="12700" cap="flat" cmpd="sng" algn="ctr">
                       <a:solidFill>
-                        <a:srgbClr val="0E1726"/>
+                        <a:srgbClr val="FFFFFF"/>
                       </a:solidFill>
                       <a:prstDash val="solid"/>
                       <a:round/>
@@ -3274,7 +3216,7 @@
                       <a:tailEnd type="none" w="med" len="med"/>
                     </a:lnB>
                     <a:solidFill>
-                      <a:srgbClr val="18243A"/>
+                      <a:srgbClr val="F1F5F9"/>
                     </a:solidFill>
                   </a:tcPr>
                 </a:tc>
@@ -3291,7 +3233,7 @@
                       <a:r>
                         <a:rPr lang="en-US" sz="1200" dirty="0">
                           <a:solidFill>
-                            <a:srgbClr val="E6EDF3"/>
+                            <a:srgbClr val="1F2937"/>
                           </a:solidFill>
                         </a:rPr>
                         <a:t>6</a:t>
@@ -3302,7 +3244,7 @@
                   <a:tcPr marL="76200" marR="76200" marT="38100" marB="38100" anchor="ctr">
                     <a:lnL w="12700" cap="flat" cmpd="sng" algn="ctr">
                       <a:solidFill>
-                        <a:srgbClr val="0E1726"/>
+                        <a:srgbClr val="FFFFFF"/>
                       </a:solidFill>
                       <a:prstDash val="solid"/>
                       <a:round/>
@@ -3311,7 +3253,7 @@
                     </a:lnL>
                     <a:lnR w="12700" cap="flat" cmpd="sng" algn="ctr">
                       <a:solidFill>
-                        <a:srgbClr val="0E1726"/>
+                        <a:srgbClr val="FFFFFF"/>
                       </a:solidFill>
                       <a:prstDash val="solid"/>
                       <a:round/>
@@ -3320,7 +3262,7 @@
                     </a:lnR>
                     <a:lnT w="12700" cap="flat" cmpd="sng" algn="ctr">
                       <a:solidFill>
-                        <a:srgbClr val="0E1726"/>
+                        <a:srgbClr val="FFFFFF"/>
                       </a:solidFill>
                       <a:prstDash val="solid"/>
                       <a:round/>
@@ -3329,7 +3271,7 @@
                     </a:lnT>
                     <a:lnB w="12700" cap="flat" cmpd="sng" algn="ctr">
                       <a:solidFill>
-                        <a:srgbClr val="0E1726"/>
+                        <a:srgbClr val="FFFFFF"/>
                       </a:solidFill>
                       <a:prstDash val="solid"/>
                       <a:round/>
@@ -3337,7 +3279,7 @@
                       <a:tailEnd type="none" w="med" len="med"/>
                     </a:lnB>
                     <a:solidFill>
-                      <a:srgbClr val="1E2B45"/>
+                      <a:srgbClr val="E8EDF3"/>
                     </a:solidFill>
                   </a:tcPr>
                 </a:tc>
@@ -3352,7 +3294,7 @@
                       <a:r>
                         <a:rPr lang="en-US" sz="1200" dirty="0">
                           <a:solidFill>
-                            <a:srgbClr val="E6EDF3"/>
+                            <a:srgbClr val="1F2937"/>
                           </a:solidFill>
                         </a:rPr>
                         <a:t>Auth &amp; access</a:t>
@@ -3363,7 +3305,7 @@
                   <a:tcPr marL="76200" marR="76200" marT="38100" marB="38100" anchor="ctr">
                     <a:lnL w="12700" cap="flat" cmpd="sng" algn="ctr">
                       <a:solidFill>
-                        <a:srgbClr val="0E1726"/>
+                        <a:srgbClr val="FFFFFF"/>
                       </a:solidFill>
                       <a:prstDash val="solid"/>
                       <a:round/>
@@ -3372,7 +3314,7 @@
                     </a:lnL>
                     <a:lnR w="12700" cap="flat" cmpd="sng" algn="ctr">
                       <a:solidFill>
-                        <a:srgbClr val="0E1726"/>
+                        <a:srgbClr val="FFFFFF"/>
                       </a:solidFill>
                       <a:prstDash val="solid"/>
                       <a:round/>
@@ -3381,7 +3323,7 @@
                     </a:lnR>
                     <a:lnT w="12700" cap="flat" cmpd="sng" algn="ctr">
                       <a:solidFill>
-                        <a:srgbClr val="0E1726"/>
+                        <a:srgbClr val="FFFFFF"/>
                       </a:solidFill>
                       <a:prstDash val="solid"/>
                       <a:round/>
@@ -3390,7 +3332,7 @@
                     </a:lnT>
                     <a:lnB w="12700" cap="flat" cmpd="sng" algn="ctr">
                       <a:solidFill>
-                        <a:srgbClr val="0E1726"/>
+                        <a:srgbClr val="FFFFFF"/>
                       </a:solidFill>
                       <a:prstDash val="solid"/>
                       <a:round/>
@@ -3398,7 +3340,7 @@
                       <a:tailEnd type="none" w="med" len="med"/>
                     </a:lnB>
                     <a:solidFill>
-                      <a:srgbClr val="1E2B45"/>
+                      <a:srgbClr val="E8EDF3"/>
                     </a:solidFill>
                   </a:tcPr>
                 </a:tc>
@@ -3413,7 +3355,7 @@
                       <a:r>
                         <a:rPr lang="en-US" sz="1200" dirty="0">
                           <a:solidFill>
-                            <a:srgbClr val="E6EDF3"/>
+                            <a:srgbClr val="1F2937"/>
                           </a:solidFill>
                         </a:rPr>
                         <a:t>authorize every request</a:t>
@@ -3424,7 +3366,7 @@
                   <a:tcPr marL="76200" marR="76200" marT="38100" marB="38100" anchor="ctr">
                     <a:lnL w="12700" cap="flat" cmpd="sng" algn="ctr">
                       <a:solidFill>
-                        <a:srgbClr val="0E1726"/>
+                        <a:srgbClr val="FFFFFF"/>
                       </a:solidFill>
                       <a:prstDash val="solid"/>
                       <a:round/>
@@ -3433,7 +3375,7 @@
                     </a:lnL>
                     <a:lnR w="12700" cap="flat" cmpd="sng" algn="ctr">
                       <a:solidFill>
-                        <a:srgbClr val="0E1726"/>
+                        <a:srgbClr val="FFFFFF"/>
                       </a:solidFill>
                       <a:prstDash val="solid"/>
                       <a:round/>
@@ -3442,7 +3384,7 @@
                     </a:lnR>
                     <a:lnT w="12700" cap="flat" cmpd="sng" algn="ctr">
                       <a:solidFill>
-                        <a:srgbClr val="0E1726"/>
+                        <a:srgbClr val="FFFFFF"/>
                       </a:solidFill>
                       <a:prstDash val="solid"/>
                       <a:round/>
@@ -3451,7 +3393,7 @@
                     </a:lnT>
                     <a:lnB w="12700" cap="flat" cmpd="sng" algn="ctr">
                       <a:solidFill>
-                        <a:srgbClr val="0E1726"/>
+                        <a:srgbClr val="FFFFFF"/>
                       </a:solidFill>
                       <a:prstDash val="solid"/>
                       <a:round/>
@@ -3459,7 +3401,7 @@
                       <a:tailEnd type="none" w="med" len="med"/>
                     </a:lnB>
                     <a:solidFill>
-                      <a:srgbClr val="1E2B45"/>
+                      <a:srgbClr val="E8EDF3"/>
                     </a:solidFill>
                   </a:tcPr>
                 </a:tc>
@@ -3495,7 +3437,7 @@
             <a:r>
               <a:rPr lang="en-US" sz="900" dirty="0">
                 <a:solidFill>
-                  <a:srgbClr val="94A3B8"/>
+                  <a:srgbClr val="64748B"/>
                 </a:solidFill>
                 <a:latin typeface="Calibri" pitchFamily="34" charset="0"/>
                 <a:ea typeface="Calibri" pitchFamily="34" charset="-122"/>
@@ -3507,38 +3449,9 @@
           </a:p>
         </p:txBody>
       </p:sp>
-      <p:sp>
-        <p:nvSpPr>
-          <p:cNvPr id="7" name="Shape 3"/>
-          <p:cNvSpPr/>
-          <p:nvPr/>
-        </p:nvSpPr>
-        <p:spPr>
-          <a:xfrm>
-            <a:off x="7772400" y="4590288"/>
-            <a:ext cx="969264" cy="475488"/>
-          </a:xfrm>
-          <a:prstGeom prst="roundRect">
-            <a:avLst>
-              <a:gd name="adj" fmla="val 11538"/>
-            </a:avLst>
-          </a:prstGeom>
-          <a:solidFill>
-            <a:srgbClr val="FFFFFF"/>
-          </a:solidFill>
-          <a:ln/>
-          <a:effectLst>
-            <a:outerShdw sx="100000" sy="100000" kx="0" ky="0" algn="bl" rotWithShape="0" blurRad="101600" dist="38100" dir="5400000">
-              <a:srgbClr val="000000">
-                <a:alpha val="35000"/>
-              </a:srgbClr>
-            </a:outerShdw>
-          </a:effectLst>
-        </p:spPr>
-      </p:sp>
       <p:pic>
         <p:nvPicPr>
-          <p:cNvPr id="8" name="Image 1" descr="/Users/pop7/Library/CloudStorage/OneDrive-MonsterConnectCo.,Ltd/Lecture/KOSEN69 - software-security/slides/pptx/assets/logo-small.png">    </p:cNvPr>
+          <p:cNvPr id="7" name="Image 1" descr="/Users/pop7/Library/CloudStorage/OneDrive-MonsterConnectCo.,Ltd/Lecture/KOSEN69 - software-security/slides/pptx/assets/logo-small.png">    </p:cNvPr>
           <p:cNvPicPr>
             <a:picLocks noChangeAspect="1"/>
           </p:cNvPicPr>
@@ -3552,7 +3465,7 @@
         </p:blipFill>
         <p:spPr>
           <a:xfrm>
-            <a:off x="7872984" y="4681728"/>
+            <a:off x="7882128" y="4700016"/>
             <a:ext cx="768096" cy="356616"/>
           </a:xfrm>
           <a:prstGeom prst="rect">
@@ -3574,7 +3487,7 @@
     <p:bg>
       <p:bgPr>
         <a:solidFill>
-          <a:srgbClr val="0E1726"/>
+          <a:srgbClr val="FFFFFF"/>
         </a:solidFill>
       </p:bgPr>
     </p:bg>
@@ -3611,9 +3524,9 @@
           </a:solidFill>
           <a:ln/>
           <a:effectLst>
-            <a:outerShdw sx="100000" sy="100000" kx="0" ky="0" algn="bl" rotWithShape="0" blurRad="101600" dist="38100" dir="5400000">
+            <a:outerShdw sx="100000" sy="100000" kx="0" ky="0" algn="bl" rotWithShape="0" blurRad="76200" dist="25400" dir="5400000">
               <a:srgbClr val="000000">
-                <a:alpha val="35000"/>
+                <a:alpha val="12000"/>
               </a:srgbClr>
             </a:outerShdw>
           </a:effectLst>
@@ -3670,7 +3583,7 @@
             <a:r>
               <a:rPr lang="en-US" sz="2600" b="1" dirty="0">
                 <a:solidFill>
-                  <a:srgbClr val="E6EDF3"/>
+                  <a:srgbClr val="1F2937"/>
                 </a:solidFill>
                 <a:latin typeface="Arial" pitchFamily="34" charset="0"/>
                 <a:ea typeface="Arial" pitchFamily="34" charset="-122"/>
@@ -3709,7 +3622,7 @@
             <a:r>
               <a:rPr lang="en-US" sz="1400" dirty="0">
                 <a:solidFill>
-                  <a:srgbClr val="E6EDF3"/>
+                  <a:srgbClr val="1F2937"/>
                 </a:solidFill>
                 <a:latin typeface="Calibri" pitchFamily="34" charset="0"/>
                 <a:ea typeface="Calibri" pitchFamily="34" charset="-122"/>
@@ -3774,7 +3687,7 @@
                   <a:tcPr marL="76200" marR="76200" marT="38100" marB="38100" anchor="ctr">
                     <a:lnL w="12700" cap="flat" cmpd="sng" algn="ctr">
                       <a:solidFill>
-                        <a:srgbClr val="0E1726"/>
+                        <a:srgbClr val="FFFFFF"/>
                       </a:solidFill>
                       <a:prstDash val="solid"/>
                       <a:round/>
@@ -3783,7 +3696,7 @@
                     </a:lnL>
                     <a:lnR w="12700" cap="flat" cmpd="sng" algn="ctr">
                       <a:solidFill>
-                        <a:srgbClr val="0E1726"/>
+                        <a:srgbClr val="FFFFFF"/>
                       </a:solidFill>
                       <a:prstDash val="solid"/>
                       <a:round/>
@@ -3792,7 +3705,7 @@
                     </a:lnR>
                     <a:lnT w="12700" cap="flat" cmpd="sng" algn="ctr">
                       <a:solidFill>
-                        <a:srgbClr val="0E1726"/>
+                        <a:srgbClr val="FFFFFF"/>
                       </a:solidFill>
                       <a:prstDash val="solid"/>
                       <a:round/>
@@ -3801,7 +3714,7 @@
                     </a:lnT>
                     <a:lnB w="12700" cap="flat" cmpd="sng" algn="ctr">
                       <a:solidFill>
-                        <a:srgbClr val="0E1726"/>
+                        <a:srgbClr val="FFFFFF"/>
                       </a:solidFill>
                       <a:prstDash val="solid"/>
                       <a:round/>
@@ -3835,7 +3748,7 @@
                   <a:tcPr marL="76200" marR="76200" marT="38100" marB="38100" anchor="ctr">
                     <a:lnL w="12700" cap="flat" cmpd="sng" algn="ctr">
                       <a:solidFill>
-                        <a:srgbClr val="0E1726"/>
+                        <a:srgbClr val="FFFFFF"/>
                       </a:solidFill>
                       <a:prstDash val="solid"/>
                       <a:round/>
@@ -3844,7 +3757,7 @@
                     </a:lnL>
                     <a:lnR w="12700" cap="flat" cmpd="sng" algn="ctr">
                       <a:solidFill>
-                        <a:srgbClr val="0E1726"/>
+                        <a:srgbClr val="FFFFFF"/>
                       </a:solidFill>
                       <a:prstDash val="solid"/>
                       <a:round/>
@@ -3853,7 +3766,7 @@
                     </a:lnR>
                     <a:lnT w="12700" cap="flat" cmpd="sng" algn="ctr">
                       <a:solidFill>
-                        <a:srgbClr val="0E1726"/>
+                        <a:srgbClr val="FFFFFF"/>
                       </a:solidFill>
                       <a:prstDash val="solid"/>
                       <a:round/>
@@ -3862,7 +3775,7 @@
                     </a:lnT>
                     <a:lnB w="12700" cap="flat" cmpd="sng" algn="ctr">
                       <a:solidFill>
-                        <a:srgbClr val="0E1726"/>
+                        <a:srgbClr val="FFFFFF"/>
                       </a:solidFill>
                       <a:prstDash val="solid"/>
                       <a:round/>
@@ -3896,7 +3809,7 @@
                   <a:tcPr marL="76200" marR="76200" marT="38100" marB="38100" anchor="ctr">
                     <a:lnL w="12700" cap="flat" cmpd="sng" algn="ctr">
                       <a:solidFill>
-                        <a:srgbClr val="0E1726"/>
+                        <a:srgbClr val="FFFFFF"/>
                       </a:solidFill>
                       <a:prstDash val="solid"/>
                       <a:round/>
@@ -3905,7 +3818,7 @@
                     </a:lnL>
                     <a:lnR w="12700" cap="flat" cmpd="sng" algn="ctr">
                       <a:solidFill>
-                        <a:srgbClr val="0E1726"/>
+                        <a:srgbClr val="FFFFFF"/>
                       </a:solidFill>
                       <a:prstDash val="solid"/>
                       <a:round/>
@@ -3914,7 +3827,7 @@
                     </a:lnR>
                     <a:lnT w="12700" cap="flat" cmpd="sng" algn="ctr">
                       <a:solidFill>
-                        <a:srgbClr val="0E1726"/>
+                        <a:srgbClr val="FFFFFF"/>
                       </a:solidFill>
                       <a:prstDash val="solid"/>
                       <a:round/>
@@ -3923,7 +3836,7 @@
                     </a:lnT>
                     <a:lnB w="12700" cap="flat" cmpd="sng" algn="ctr">
                       <a:solidFill>
-                        <a:srgbClr val="0E1726"/>
+                        <a:srgbClr val="FFFFFF"/>
                       </a:solidFill>
                       <a:prstDash val="solid"/>
                       <a:round/>
@@ -3957,7 +3870,7 @@
                   <a:tcPr marL="76200" marR="76200" marT="38100" marB="38100" anchor="ctr">
                     <a:lnL w="12700" cap="flat" cmpd="sng" algn="ctr">
                       <a:solidFill>
-                        <a:srgbClr val="0E1726"/>
+                        <a:srgbClr val="FFFFFF"/>
                       </a:solidFill>
                       <a:prstDash val="solid"/>
                       <a:round/>
@@ -3966,7 +3879,7 @@
                     </a:lnL>
                     <a:lnR w="12700" cap="flat" cmpd="sng" algn="ctr">
                       <a:solidFill>
-                        <a:srgbClr val="0E1726"/>
+                        <a:srgbClr val="FFFFFF"/>
                       </a:solidFill>
                       <a:prstDash val="solid"/>
                       <a:round/>
@@ -3975,7 +3888,7 @@
                     </a:lnR>
                     <a:lnT w="12700" cap="flat" cmpd="sng" algn="ctr">
                       <a:solidFill>
-                        <a:srgbClr val="0E1726"/>
+                        <a:srgbClr val="FFFFFF"/>
                       </a:solidFill>
                       <a:prstDash val="solid"/>
                       <a:round/>
@@ -3984,7 +3897,7 @@
                     </a:lnT>
                     <a:lnB w="12700" cap="flat" cmpd="sng" algn="ctr">
                       <a:solidFill>
-                        <a:srgbClr val="0E1726"/>
+                        <a:srgbClr val="FFFFFF"/>
                       </a:solidFill>
                       <a:prstDash val="solid"/>
                       <a:round/>
@@ -4018,7 +3931,7 @@
                   <a:tcPr marL="76200" marR="76200" marT="38100" marB="38100" anchor="ctr">
                     <a:lnL w="12700" cap="flat" cmpd="sng" algn="ctr">
                       <a:solidFill>
-                        <a:srgbClr val="0E1726"/>
+                        <a:srgbClr val="FFFFFF"/>
                       </a:solidFill>
                       <a:prstDash val="solid"/>
                       <a:round/>
@@ -4027,7 +3940,7 @@
                     </a:lnL>
                     <a:lnR w="12700" cap="flat" cmpd="sng" algn="ctr">
                       <a:solidFill>
-                        <a:srgbClr val="0E1726"/>
+                        <a:srgbClr val="FFFFFF"/>
                       </a:solidFill>
                       <a:prstDash val="solid"/>
                       <a:round/>
@@ -4036,7 +3949,7 @@
                     </a:lnR>
                     <a:lnT w="12700" cap="flat" cmpd="sng" algn="ctr">
                       <a:solidFill>
-                        <a:srgbClr val="0E1726"/>
+                        <a:srgbClr val="FFFFFF"/>
                       </a:solidFill>
                       <a:prstDash val="solid"/>
                       <a:round/>
@@ -4045,7 +3958,7 @@
                     </a:lnT>
                     <a:lnB w="12700" cap="flat" cmpd="sng" algn="ctr">
                       <a:solidFill>
-                        <a:srgbClr val="0E1726"/>
+                        <a:srgbClr val="FFFFFF"/>
                       </a:solidFill>
                       <a:prstDash val="solid"/>
                       <a:round/>
@@ -4079,7 +3992,7 @@
                   <a:tcPr marL="76200" marR="76200" marT="38100" marB="38100" anchor="ctr">
                     <a:lnL w="12700" cap="flat" cmpd="sng" algn="ctr">
                       <a:solidFill>
-                        <a:srgbClr val="0E1726"/>
+                        <a:srgbClr val="FFFFFF"/>
                       </a:solidFill>
                       <a:prstDash val="solid"/>
                       <a:round/>
@@ -4088,7 +4001,7 @@
                     </a:lnL>
                     <a:lnR w="12700" cap="flat" cmpd="sng" algn="ctr">
                       <a:solidFill>
-                        <a:srgbClr val="0E1726"/>
+                        <a:srgbClr val="FFFFFF"/>
                       </a:solidFill>
                       <a:prstDash val="solid"/>
                       <a:round/>
@@ -4097,7 +4010,7 @@
                     </a:lnR>
                     <a:lnT w="12700" cap="flat" cmpd="sng" algn="ctr">
                       <a:solidFill>
-                        <a:srgbClr val="0E1726"/>
+                        <a:srgbClr val="FFFFFF"/>
                       </a:solidFill>
                       <a:prstDash val="solid"/>
                       <a:round/>
@@ -4106,7 +4019,7 @@
                     </a:lnT>
                     <a:lnB w="12700" cap="flat" cmpd="sng" algn="ctr">
                       <a:solidFill>
-                        <a:srgbClr val="0E1726"/>
+                        <a:srgbClr val="FFFFFF"/>
                       </a:solidFill>
                       <a:prstDash val="solid"/>
                       <a:round/>
@@ -4140,13 +4053,13 @@
             </a:avLst>
           </a:prstGeom>
           <a:solidFill>
-            <a:srgbClr val="18243A"/>
+            <a:srgbClr val="F1F5F9"/>
           </a:solidFill>
           <a:ln/>
           <a:effectLst>
-            <a:outerShdw sx="100000" sy="100000" kx="0" ky="0" algn="bl" rotWithShape="0" blurRad="101600" dist="38100" dir="5400000">
+            <a:outerShdw sx="100000" sy="100000" kx="0" ky="0" algn="bl" rotWithShape="0" blurRad="76200" dist="25400" dir="5400000">
               <a:srgbClr val="000000">
-                <a:alpha val="35000"/>
+                <a:alpha val="12000"/>
               </a:srgbClr>
             </a:outerShdw>
           </a:effectLst>
@@ -4183,7 +4096,7 @@
             <a:r>
               <a:rPr lang="en-US" sz="1400" dirty="0">
                 <a:solidFill>
-                  <a:srgbClr val="E6EDF3"/>
+                  <a:srgbClr val="1F2937"/>
                 </a:solidFill>
                 <a:latin typeface="Calibri" pitchFamily="34" charset="0"/>
                 <a:ea typeface="Calibri" pitchFamily="34" charset="-122"/>
@@ -4204,7 +4117,7 @@
             <a:r>
               <a:rPr lang="en-US" sz="1400" dirty="0">
                 <a:solidFill>
-                  <a:srgbClr val="E6EDF3"/>
+                  <a:srgbClr val="1F2937"/>
                 </a:solidFill>
                 <a:latin typeface="Calibri" pitchFamily="34" charset="0"/>
                 <a:ea typeface="Calibri" pitchFamily="34" charset="-122"/>
@@ -4243,7 +4156,7 @@
             <a:r>
               <a:rPr lang="en-US" sz="900" dirty="0">
                 <a:solidFill>
-                  <a:srgbClr val="94A3B8"/>
+                  <a:srgbClr val="64748B"/>
                 </a:solidFill>
                 <a:latin typeface="Calibri" pitchFamily="34" charset="0"/>
                 <a:ea typeface="Calibri" pitchFamily="34" charset="-122"/>
@@ -4255,38 +4168,9 @@
           </a:p>
         </p:txBody>
       </p:sp>
-      <p:sp>
-        <p:nvSpPr>
-          <p:cNvPr id="10" name="Shape 6"/>
-          <p:cNvSpPr/>
-          <p:nvPr/>
-        </p:nvSpPr>
-        <p:spPr>
-          <a:xfrm>
-            <a:off x="7772400" y="4590288"/>
-            <a:ext cx="969264" cy="475488"/>
-          </a:xfrm>
-          <a:prstGeom prst="roundRect">
-            <a:avLst>
-              <a:gd name="adj" fmla="val 11538"/>
-            </a:avLst>
-          </a:prstGeom>
-          <a:solidFill>
-            <a:srgbClr val="FFFFFF"/>
-          </a:solidFill>
-          <a:ln/>
-          <a:effectLst>
-            <a:outerShdw sx="100000" sy="100000" kx="0" ky="0" algn="bl" rotWithShape="0" blurRad="101600" dist="38100" dir="5400000">
-              <a:srgbClr val="000000">
-                <a:alpha val="35000"/>
-              </a:srgbClr>
-            </a:outerShdw>
-          </a:effectLst>
-        </p:spPr>
-      </p:sp>
       <p:pic>
         <p:nvPicPr>
-          <p:cNvPr id="11" name="Image 1" descr="/Users/pop7/Library/CloudStorage/OneDrive-MonsterConnectCo.,Ltd/Lecture/KOSEN69 - software-security/slides/pptx/assets/logo-small.png">    </p:cNvPr>
+          <p:cNvPr id="10" name="Image 1" descr="/Users/pop7/Library/CloudStorage/OneDrive-MonsterConnectCo.,Ltd/Lecture/KOSEN69 - software-security/slides/pptx/assets/logo-small.png">    </p:cNvPr>
           <p:cNvPicPr>
             <a:picLocks noChangeAspect="1"/>
           </p:cNvPicPr>
@@ -4300,7 +4184,7 @@
         </p:blipFill>
         <p:spPr>
           <a:xfrm>
-            <a:off x="7872984" y="4681728"/>
+            <a:off x="7882128" y="4700016"/>
             <a:ext cx="768096" cy="356616"/>
           </a:xfrm>
           <a:prstGeom prst="rect">
@@ -4322,7 +4206,7 @@
     <p:bg>
       <p:bgPr>
         <a:solidFill>
-          <a:srgbClr val="0E1726"/>
+          <a:srgbClr val="FFFFFF"/>
         </a:solidFill>
       </p:bgPr>
     </p:bg>
@@ -4359,9 +4243,9 @@
           </a:solidFill>
           <a:ln/>
           <a:effectLst>
-            <a:outerShdw sx="100000" sy="100000" kx="0" ky="0" algn="bl" rotWithShape="0" blurRad="101600" dist="38100" dir="5400000">
+            <a:outerShdw sx="100000" sy="100000" kx="0" ky="0" algn="bl" rotWithShape="0" blurRad="76200" dist="25400" dir="5400000">
               <a:srgbClr val="000000">
-                <a:alpha val="35000"/>
+                <a:alpha val="12000"/>
               </a:srgbClr>
             </a:outerShdw>
           </a:effectLst>
@@ -4418,7 +4302,7 @@
             <a:r>
               <a:rPr lang="en-US" sz="2600" b="1" dirty="0">
                 <a:solidFill>
-                  <a:srgbClr val="E6EDF3"/>
+                  <a:srgbClr val="1F2937"/>
                 </a:solidFill>
                 <a:latin typeface="Arial" pitchFamily="34" charset="0"/>
                 <a:ea typeface="Arial" pitchFamily="34" charset="-122"/>
@@ -4457,7 +4341,7 @@
             <a:r>
               <a:rPr lang="en-US" sz="1400" dirty="0">
                 <a:solidFill>
-                  <a:srgbClr val="E6EDF3"/>
+                  <a:srgbClr val="1F2937"/>
                 </a:solidFill>
                 <a:latin typeface="Calibri" pitchFamily="34" charset="0"/>
                 <a:ea typeface="Calibri" pitchFamily="34" charset="-122"/>
@@ -4486,13 +4370,13 @@
             </a:avLst>
           </a:prstGeom>
           <a:solidFill>
-            <a:srgbClr val="18243A"/>
+            <a:srgbClr val="F1F5F9"/>
           </a:solidFill>
           <a:ln/>
           <a:effectLst>
-            <a:outerShdw sx="100000" sy="100000" kx="0" ky="0" algn="bl" rotWithShape="0" blurRad="101600" dist="38100" dir="5400000">
+            <a:outerShdw sx="100000" sy="100000" kx="0" ky="0" algn="bl" rotWithShape="0" blurRad="76200" dist="25400" dir="5400000">
               <a:srgbClr val="000000">
-                <a:alpha val="35000"/>
+                <a:alpha val="12000"/>
               </a:srgbClr>
             </a:outerShdw>
           </a:effectLst>
@@ -4529,7 +4413,7 @@
             <a:r>
               <a:rPr lang="en-US" sz="1400" dirty="0">
                 <a:solidFill>
-                  <a:srgbClr val="E6EDF3"/>
+                  <a:srgbClr val="1F2937"/>
                 </a:solidFill>
                 <a:latin typeface="Calibri" pitchFamily="34" charset="0"/>
                 <a:ea typeface="Calibri" pitchFamily="34" charset="-122"/>
@@ -4550,7 +4434,7 @@
             <a:r>
               <a:rPr lang="en-US" sz="1400" dirty="0">
                 <a:solidFill>
-                  <a:srgbClr val="E6EDF3"/>
+                  <a:srgbClr val="1F2937"/>
                 </a:solidFill>
                 <a:latin typeface="Calibri" pitchFamily="34" charset="0"/>
                 <a:ea typeface="Calibri" pitchFamily="34" charset="-122"/>
@@ -4571,7 +4455,7 @@
             <a:r>
               <a:rPr lang="en-US" sz="1400" dirty="0">
                 <a:solidFill>
-                  <a:srgbClr val="E6EDF3"/>
+                  <a:srgbClr val="1F2937"/>
                 </a:solidFill>
                 <a:latin typeface="Calibri" pitchFamily="34" charset="0"/>
                 <a:ea typeface="Calibri" pitchFamily="34" charset="-122"/>
@@ -4592,7 +4476,7 @@
             <a:r>
               <a:rPr lang="en-US" sz="1400" dirty="0">
                 <a:solidFill>
-                  <a:srgbClr val="E6EDF3"/>
+                  <a:srgbClr val="1F2937"/>
                 </a:solidFill>
                 <a:latin typeface="Calibri" pitchFamily="34" charset="0"/>
                 <a:ea typeface="Calibri" pitchFamily="34" charset="-122"/>
@@ -4621,7 +4505,7 @@
             </a:avLst>
           </a:prstGeom>
           <a:solidFill>
-            <a:srgbClr val="1E2B45"/>
+            <a:srgbClr val="E8EDF3"/>
           </a:solidFill>
           <a:ln/>
         </p:spPr>
@@ -4692,7 +4576,7 @@
             <a:r>
               <a:rPr lang="en-US" sz="900" dirty="0">
                 <a:solidFill>
-                  <a:srgbClr val="94A3B8"/>
+                  <a:srgbClr val="64748B"/>
                 </a:solidFill>
                 <a:latin typeface="Calibri" pitchFamily="34" charset="0"/>
                 <a:ea typeface="Calibri" pitchFamily="34" charset="-122"/>
@@ -4704,38 +4588,9 @@
           </a:p>
         </p:txBody>
       </p:sp>
-      <p:sp>
-        <p:nvSpPr>
-          <p:cNvPr id="11" name="Shape 8"/>
-          <p:cNvSpPr/>
-          <p:nvPr/>
-        </p:nvSpPr>
-        <p:spPr>
-          <a:xfrm>
-            <a:off x="7772400" y="4590288"/>
-            <a:ext cx="969264" cy="475488"/>
-          </a:xfrm>
-          <a:prstGeom prst="roundRect">
-            <a:avLst>
-              <a:gd name="adj" fmla="val 11538"/>
-            </a:avLst>
-          </a:prstGeom>
-          <a:solidFill>
-            <a:srgbClr val="FFFFFF"/>
-          </a:solidFill>
-          <a:ln/>
-          <a:effectLst>
-            <a:outerShdw sx="100000" sy="100000" kx="0" ky="0" algn="bl" rotWithShape="0" blurRad="101600" dist="38100" dir="5400000">
-              <a:srgbClr val="000000">
-                <a:alpha val="35000"/>
-              </a:srgbClr>
-            </a:outerShdw>
-          </a:effectLst>
-        </p:spPr>
-      </p:sp>
       <p:pic>
         <p:nvPicPr>
-          <p:cNvPr id="12" name="Image 1" descr="/Users/pop7/Library/CloudStorage/OneDrive-MonsterConnectCo.,Ltd/Lecture/KOSEN69 - software-security/slides/pptx/assets/logo-small.png">    </p:cNvPr>
+          <p:cNvPr id="11" name="Image 1" descr="/Users/pop7/Library/CloudStorage/OneDrive-MonsterConnectCo.,Ltd/Lecture/KOSEN69 - software-security/slides/pptx/assets/logo-small.png">    </p:cNvPr>
           <p:cNvPicPr>
             <a:picLocks noChangeAspect="1"/>
           </p:cNvPicPr>
@@ -4749,7 +4604,7 @@
         </p:blipFill>
         <p:spPr>
           <a:xfrm>
-            <a:off x="7872984" y="4681728"/>
+            <a:off x="7882128" y="4700016"/>
             <a:ext cx="768096" cy="356616"/>
           </a:xfrm>
           <a:prstGeom prst="rect">
@@ -4771,7 +4626,7 @@
     <p:bg>
       <p:bgPr>
         <a:solidFill>
-          <a:srgbClr val="0E1726"/>
+          <a:srgbClr val="FFFFFF"/>
         </a:solidFill>
       </p:bgPr>
     </p:bg>
@@ -4808,9 +4663,9 @@
           </a:solidFill>
           <a:ln/>
           <a:effectLst>
-            <a:outerShdw sx="100000" sy="100000" kx="0" ky="0" algn="bl" rotWithShape="0" blurRad="101600" dist="38100" dir="5400000">
+            <a:outerShdw sx="100000" sy="100000" kx="0" ky="0" algn="bl" rotWithShape="0" blurRad="76200" dist="25400" dir="5400000">
               <a:srgbClr val="000000">
-                <a:alpha val="35000"/>
+                <a:alpha val="12000"/>
               </a:srgbClr>
             </a:outerShdw>
           </a:effectLst>
@@ -4867,7 +4722,7 @@
             <a:r>
               <a:rPr lang="en-US" sz="2600" b="1" dirty="0">
                 <a:solidFill>
-                  <a:srgbClr val="E6EDF3"/>
+                  <a:srgbClr val="1F2937"/>
                 </a:solidFill>
                 <a:latin typeface="Arial" pitchFamily="34" charset="0"/>
                 <a:ea typeface="Arial" pitchFamily="34" charset="-122"/>
@@ -4896,13 +4751,13 @@
             </a:avLst>
           </a:prstGeom>
           <a:solidFill>
-            <a:srgbClr val="18243A"/>
+            <a:srgbClr val="F1F5F9"/>
           </a:solidFill>
           <a:ln/>
           <a:effectLst>
-            <a:outerShdw sx="100000" sy="100000" kx="0" ky="0" algn="bl" rotWithShape="0" blurRad="101600" dist="38100" dir="5400000">
+            <a:outerShdw sx="100000" sy="100000" kx="0" ky="0" algn="bl" rotWithShape="0" blurRad="76200" dist="25400" dir="5400000">
               <a:srgbClr val="000000">
-                <a:alpha val="35000"/>
+                <a:alpha val="12000"/>
               </a:srgbClr>
             </a:outerShdw>
           </a:effectLst>
@@ -4939,7 +4794,7 @@
             <a:r>
               <a:rPr lang="en-US" sz="1400" dirty="0">
                 <a:solidFill>
-                  <a:srgbClr val="E6EDF3"/>
+                  <a:srgbClr val="1F2937"/>
                 </a:solidFill>
                 <a:latin typeface="Calibri" pitchFamily="34" charset="0"/>
                 <a:ea typeface="Calibri" pitchFamily="34" charset="-122"/>
@@ -4960,7 +4815,7 @@
             <a:r>
               <a:rPr lang="en-US" sz="1400" dirty="0">
                 <a:solidFill>
-                  <a:srgbClr val="E6EDF3"/>
+                  <a:srgbClr val="1F2937"/>
                 </a:solidFill>
                 <a:latin typeface="Calibri" pitchFamily="34" charset="0"/>
                 <a:ea typeface="Calibri" pitchFamily="34" charset="-122"/>
@@ -4981,7 +4836,7 @@
             <a:r>
               <a:rPr lang="en-US" sz="1400" dirty="0">
                 <a:solidFill>
-                  <a:srgbClr val="E6EDF3"/>
+                  <a:srgbClr val="1F2937"/>
                 </a:solidFill>
                 <a:latin typeface="Calibri" pitchFamily="34" charset="0"/>
                 <a:ea typeface="Calibri" pitchFamily="34" charset="-122"/>
@@ -5002,7 +4857,7 @@
             <a:r>
               <a:rPr lang="en-US" sz="1400" dirty="0">
                 <a:solidFill>
-                  <a:srgbClr val="E6EDF3"/>
+                  <a:srgbClr val="1F2937"/>
                 </a:solidFill>
                 <a:latin typeface="Calibri" pitchFamily="34" charset="0"/>
                 <a:ea typeface="Calibri" pitchFamily="34" charset="-122"/>
@@ -5041,7 +4896,7 @@
             <a:r>
               <a:rPr lang="en-US" sz="900" dirty="0">
                 <a:solidFill>
-                  <a:srgbClr val="94A3B8"/>
+                  <a:srgbClr val="64748B"/>
                 </a:solidFill>
                 <a:latin typeface="Calibri" pitchFamily="34" charset="0"/>
                 <a:ea typeface="Calibri" pitchFamily="34" charset="-122"/>
@@ -5053,38 +4908,9 @@
           </a:p>
         </p:txBody>
       </p:sp>
-      <p:sp>
-        <p:nvSpPr>
-          <p:cNvPr id="8" name="Shape 5"/>
-          <p:cNvSpPr/>
-          <p:nvPr/>
-        </p:nvSpPr>
-        <p:spPr>
-          <a:xfrm>
-            <a:off x="7772400" y="4590288"/>
-            <a:ext cx="969264" cy="475488"/>
-          </a:xfrm>
-          <a:prstGeom prst="roundRect">
-            <a:avLst>
-              <a:gd name="adj" fmla="val 11538"/>
-            </a:avLst>
-          </a:prstGeom>
-          <a:solidFill>
-            <a:srgbClr val="FFFFFF"/>
-          </a:solidFill>
-          <a:ln/>
-          <a:effectLst>
-            <a:outerShdw sx="100000" sy="100000" kx="0" ky="0" algn="bl" rotWithShape="0" blurRad="101600" dist="38100" dir="5400000">
-              <a:srgbClr val="000000">
-                <a:alpha val="35000"/>
-              </a:srgbClr>
-            </a:outerShdw>
-          </a:effectLst>
-        </p:spPr>
-      </p:sp>
       <p:pic>
         <p:nvPicPr>
-          <p:cNvPr id="9" name="Image 1" descr="/Users/pop7/Library/CloudStorage/OneDrive-MonsterConnectCo.,Ltd/Lecture/KOSEN69 - software-security/slides/pptx/assets/logo-small.png">    </p:cNvPr>
+          <p:cNvPr id="8" name="Image 1" descr="/Users/pop7/Library/CloudStorage/OneDrive-MonsterConnectCo.,Ltd/Lecture/KOSEN69 - software-security/slides/pptx/assets/logo-small.png">    </p:cNvPr>
           <p:cNvPicPr>
             <a:picLocks noChangeAspect="1"/>
           </p:cNvPicPr>
@@ -5098,7 +4924,7 @@
         </p:blipFill>
         <p:spPr>
           <a:xfrm>
-            <a:off x="7872984" y="4681728"/>
+            <a:off x="7882128" y="4700016"/>
             <a:ext cx="768096" cy="356616"/>
           </a:xfrm>
           <a:prstGeom prst="rect">
@@ -5120,7 +4946,7 @@
     <p:bg>
       <p:bgPr>
         <a:solidFill>
-          <a:srgbClr val="0E1726"/>
+          <a:srgbClr val="FFFFFF"/>
         </a:solidFill>
       </p:bgPr>
     </p:bg>
@@ -5157,9 +4983,9 @@
           </a:solidFill>
           <a:ln/>
           <a:effectLst>
-            <a:outerShdw sx="100000" sy="100000" kx="0" ky="0" algn="bl" rotWithShape="0" blurRad="101600" dist="38100" dir="5400000">
+            <a:outerShdw sx="100000" sy="100000" kx="0" ky="0" algn="bl" rotWithShape="0" blurRad="76200" dist="25400" dir="5400000">
               <a:srgbClr val="000000">
-                <a:alpha val="35000"/>
+                <a:alpha val="12000"/>
               </a:srgbClr>
             </a:outerShdw>
           </a:effectLst>
@@ -5216,7 +5042,7 @@
             <a:r>
               <a:rPr lang="en-US" sz="2600" b="1" dirty="0">
                 <a:solidFill>
-                  <a:srgbClr val="E6EDF3"/>
+                  <a:srgbClr val="1F2937"/>
                 </a:solidFill>
                 <a:latin typeface="Arial" pitchFamily="34" charset="0"/>
                 <a:ea typeface="Arial" pitchFamily="34" charset="-122"/>
@@ -5255,7 +5081,7 @@
             <a:r>
               <a:rPr lang="en-US" sz="1400" dirty="0">
                 <a:solidFill>
-                  <a:srgbClr val="E6EDF3"/>
+                  <a:srgbClr val="1F2937"/>
                 </a:solidFill>
                 <a:latin typeface="Calibri" pitchFamily="34" charset="0"/>
                 <a:ea typeface="Calibri" pitchFamily="34" charset="-122"/>
@@ -5294,7 +5120,7 @@
             <a:r>
               <a:rPr lang="en-US" sz="900" dirty="0">
                 <a:solidFill>
-                  <a:srgbClr val="94A3B8"/>
+                  <a:srgbClr val="64748B"/>
                 </a:solidFill>
                 <a:latin typeface="Calibri" pitchFamily="34" charset="0"/>
                 <a:ea typeface="Calibri" pitchFamily="34" charset="-122"/>
@@ -5306,38 +5132,9 @@
           </a:p>
         </p:txBody>
       </p:sp>
-      <p:sp>
-        <p:nvSpPr>
-          <p:cNvPr id="7" name="Shape 4"/>
-          <p:cNvSpPr/>
-          <p:nvPr/>
-        </p:nvSpPr>
-        <p:spPr>
-          <a:xfrm>
-            <a:off x="7772400" y="4590288"/>
-            <a:ext cx="969264" cy="475488"/>
-          </a:xfrm>
-          <a:prstGeom prst="roundRect">
-            <a:avLst>
-              <a:gd name="adj" fmla="val 11538"/>
-            </a:avLst>
-          </a:prstGeom>
-          <a:solidFill>
-            <a:srgbClr val="FFFFFF"/>
-          </a:solidFill>
-          <a:ln/>
-          <a:effectLst>
-            <a:outerShdw sx="100000" sy="100000" kx="0" ky="0" algn="bl" rotWithShape="0" blurRad="101600" dist="38100" dir="5400000">
-              <a:srgbClr val="000000">
-                <a:alpha val="35000"/>
-              </a:srgbClr>
-            </a:outerShdw>
-          </a:effectLst>
-        </p:spPr>
-      </p:sp>
       <p:pic>
         <p:nvPicPr>
-          <p:cNvPr id="8" name="Image 1" descr="/Users/pop7/Library/CloudStorage/OneDrive-MonsterConnectCo.,Ltd/Lecture/KOSEN69 - software-security/slides/pptx/assets/logo-small.png">    </p:cNvPr>
+          <p:cNvPr id="7" name="Image 1" descr="/Users/pop7/Library/CloudStorage/OneDrive-MonsterConnectCo.,Ltd/Lecture/KOSEN69 - software-security/slides/pptx/assets/logo-small.png">    </p:cNvPr>
           <p:cNvPicPr>
             <a:picLocks noChangeAspect="1"/>
           </p:cNvPicPr>
@@ -5351,7 +5148,7 @@
         </p:blipFill>
         <p:spPr>
           <a:xfrm>
-            <a:off x="7872984" y="4681728"/>
+            <a:off x="7882128" y="4700016"/>
             <a:ext cx="768096" cy="356616"/>
           </a:xfrm>
           <a:prstGeom prst="rect">
@@ -5373,7 +5170,7 @@
     <p:bg>
       <p:bgPr>
         <a:solidFill>
-          <a:srgbClr val="0E1726"/>
+          <a:srgbClr val="FFFFFF"/>
         </a:solidFill>
       </p:bgPr>
     </p:bg>
@@ -5418,7 +5215,7 @@
             <a:r>
               <a:rPr lang="en-US" sz="4600" b="1" dirty="0">
                 <a:solidFill>
-                  <a:srgbClr val="E6EDF3"/>
+                  <a:srgbClr val="1F2937"/>
                 </a:solidFill>
                 <a:latin typeface="Arial" pitchFamily="34" charset="0"/>
                 <a:ea typeface="Arial" pitchFamily="34" charset="-122"/>
@@ -5469,38 +5266,9 @@
           </a:p>
         </p:txBody>
       </p:sp>
-      <p:sp>
-        <p:nvSpPr>
-          <p:cNvPr id="4" name="Shape 2"/>
-          <p:cNvSpPr/>
-          <p:nvPr/>
-        </p:nvSpPr>
-        <p:spPr>
-          <a:xfrm>
-            <a:off x="7772400" y="4590288"/>
-            <a:ext cx="969264" cy="475488"/>
-          </a:xfrm>
-          <a:prstGeom prst="roundRect">
-            <a:avLst>
-              <a:gd name="adj" fmla="val 11538"/>
-            </a:avLst>
-          </a:prstGeom>
-          <a:solidFill>
-            <a:srgbClr val="FFFFFF"/>
-          </a:solidFill>
-          <a:ln/>
-          <a:effectLst>
-            <a:outerShdw sx="100000" sy="100000" kx="0" ky="0" algn="bl" rotWithShape="0" blurRad="101600" dist="38100" dir="5400000">
-              <a:srgbClr val="000000">
-                <a:alpha val="35000"/>
-              </a:srgbClr>
-            </a:outerShdw>
-          </a:effectLst>
-        </p:spPr>
-      </p:sp>
       <p:pic>
         <p:nvPicPr>
-          <p:cNvPr id="5" name="Image 0" descr="/Users/pop7/Library/CloudStorage/OneDrive-MonsterConnectCo.,Ltd/Lecture/KOSEN69 - software-security/slides/pptx/assets/logo-small.png">    </p:cNvPr>
+          <p:cNvPr id="4" name="Image 0" descr="/Users/pop7/Library/CloudStorage/OneDrive-MonsterConnectCo.,Ltd/Lecture/KOSEN69 - software-security/slides/pptx/assets/logo-small.png">    </p:cNvPr>
           <p:cNvPicPr>
             <a:picLocks noChangeAspect="1"/>
           </p:cNvPicPr>
@@ -5514,7 +5282,7 @@
         </p:blipFill>
         <p:spPr>
           <a:xfrm>
-            <a:off x="7872984" y="4681728"/>
+            <a:off x="7882128" y="4700016"/>
             <a:ext cx="768096" cy="356616"/>
           </a:xfrm>
           <a:prstGeom prst="rect">

--- a/slides/pptx/week07.pptx
+++ b/slides/pptx/week07.pptx
@@ -509,7 +509,7 @@
           <a:p>
             <a:r>
               <a:rPr lang="en-US" dirty="0"/>
-              <a:t/>
+              <a:t>Energy up — review week is a GAME, not a lecture. Set the frame: today's job is "zero surprises on exam day." ~5h block = cumulative quiz + Jeopardy + mock CTF + cheat sheet. ~2 min.</a:t>
             </a:r>
             <a:endParaRPr lang="en-US" dirty="0"/>
           </a:p>
@@ -597,7 +597,7 @@
           <a:p>
             <a:r>
               <a:rPr lang="en-US" dirty="0"/>
-              <a:t/>
+              <a:t>Roadmap, 1 min. Start the session with the cumulative review quiz (quiz1.md, 25 pts, 30 min) per the AGENDA, THEN the games. Tell them everything today mirrors the real exam.</a:t>
             </a:r>
             <a:endParaRPr lang="en-US" dirty="0"/>
           </a:p>
@@ -685,7 +685,7 @@
           <a:p>
             <a:r>
               <a:rPr lang="en-US" dirty="0"/>
-              <a:t/>
+              <a:t>Fast recap — cold-call one student per row to give the one-liner from memory. Don't lecture; it's retrieval practice. ~10 min.</a:t>
             </a:r>
             <a:endParaRPr lang="en-US" dirty="0"/>
           </a:p>
@@ -773,7 +773,7 @@
           <a:p>
             <a:r>
               <a:rPr lang="en-US" dirty="0"/>
-              <a:t/>
+              <a:t>Run by Houses/teams. Prep the board beforehand (6 categories × 5 values, questions seeded from the exam item bank). Rules: team picks, answers; wrong answer loses the points; end with a Final-Jeopardy wager. Keep it fast and loud. Award points into the CTFd/Houses board. ~60–75 min.</a:t>
             </a:r>
             <a:endParaRPr lang="en-US" dirty="0"/>
           </a:p>
@@ -861,7 +861,7 @@
           <a:p>
             <a:r>
               <a:rPr lang="en-US" dirty="0"/>
-              <a:t/>
+              <a:t>Run the EXACT Week 9 format/timing (see mock-ctf.md) so the real CTF feels familiar. Circulate; offer hints that cost points. The point is calibration: they should leave knowing what they can/can't do. ~90 min.</a:t>
             </a:r>
             <a:endParaRPr lang="en-US" dirty="0"/>
           </a:p>
@@ -949,7 +949,7 @@
           <a:p>
             <a:r>
               <a:rPr lang="en-US" dirty="0"/>
-              <a:t/>
+              <a:t>Spend real time here — these are the top exam point-losers every cohort. Ask the room which they're shaky on and drill those. ~8 min.</a:t>
             </a:r>
             <a:endParaRPr lang="en-US" dirty="0"/>
           </a:p>
@@ -1037,7 +1037,7 @@
           <a:p>
             <a:r>
               <a:rPr lang="en-US" dirty="0"/>
-              <a:t/>
+              <a:t>Making the cheat sheet IS the studying (generative learning). Decide + announce now whether it's allowed in the written exam.</a:t>
             </a:r>
             <a:endParaRPr lang="en-US" dirty="0"/>
           </a:p>
@@ -1125,7 +1125,7 @@
           <a:p>
             <a:r>
               <a:rPr lang="en-US" dirty="0"/>
-              <a:t/>
+              <a:t>Logistics: state exam dates, what to bring, room/VM readiness for W9. Reassure: today's mock = the real thing.</a:t>
             </a:r>
             <a:endParaRPr lang="en-US" dirty="0"/>
           </a:p>
@@ -4038,100 +4038,7 @@
       </p:graphicFrame>
       <p:sp>
         <p:nvSpPr>
-          <p:cNvPr id="7" name="Shape 3"/>
-          <p:cNvSpPr/>
-          <p:nvPr/>
-        </p:nvSpPr>
-        <p:spPr>
-          <a:xfrm>
-            <a:off x="457200" y="2569464"/>
-            <a:ext cx="8229600" cy="896112"/>
-          </a:xfrm>
-          <a:prstGeom prst="roundRect">
-            <a:avLst>
-              <a:gd name="adj" fmla="val 8163"/>
-            </a:avLst>
-          </a:prstGeom>
-          <a:solidFill>
-            <a:srgbClr val="F1F5F9"/>
-          </a:solidFill>
-          <a:ln/>
-          <a:effectLst>
-            <a:outerShdw sx="100000" sy="100000" kx="0" ky="0" algn="bl" rotWithShape="0" blurRad="76200" dist="25400" dir="5400000">
-              <a:srgbClr val="000000">
-                <a:alpha val="12000"/>
-              </a:srgbClr>
-            </a:outerShdw>
-          </a:effectLst>
-        </p:spPr>
-      </p:sp>
-      <p:sp>
-        <p:nvSpPr>
-          <p:cNvPr id="8" name="Text 4"/>
-          <p:cNvSpPr/>
-          <p:nvPr/>
-        </p:nvSpPr>
-        <p:spPr>
-          <a:xfrm>
-            <a:off x="731520" y="2679192"/>
-            <a:ext cx="7680960" cy="676656"/>
-          </a:xfrm>
-          <a:prstGeom prst="rect">
-            <a:avLst/>
-          </a:prstGeom>
-          <a:noFill/>
-          <a:ln/>
-        </p:spPr>
-        <p:txBody>
-          <a:bodyPr wrap="square" lIns="0" tIns="0" rIns="0" bIns="0" rtlCol="0" anchor="t"/>
-          <a:lstStyle/>
-          <a:p>
-            <a:pPr marL="342900" indent="-342900">
-              <a:spcAft>
-                <a:spcPts val="600"/>
-              </a:spcAft>
-              <a:buSzPct val="100000"/>
-              <a:buChar char="•"/>
-            </a:pPr>
-            <a:r>
-              <a:rPr lang="en-US" sz="1400" dirty="0">
-                <a:solidFill>
-                  <a:srgbClr val="1F2937"/>
-                </a:solidFill>
-                <a:latin typeface="Calibri" pitchFamily="34" charset="0"/>
-                <a:ea typeface="Calibri" pitchFamily="34" charset="-122"/>
-                <a:cs typeface="Calibri" pitchFamily="34" charset="-120"/>
-              </a:rPr>
-              <a:t>Teams pick; wrong answers lose points</a:t>
-            </a:r>
-            <a:endParaRPr lang="en-US" sz="1400" dirty="0"/>
-          </a:p>
-          <a:p>
-            <a:pPr marL="342900" indent="-342900">
-              <a:spcAft>
-                <a:spcPts val="600"/>
-              </a:spcAft>
-              <a:buSzPct val="100000"/>
-              <a:buChar char="•"/>
-            </a:pPr>
-            <a:r>
-              <a:rPr lang="en-US" sz="1400" dirty="0">
-                <a:solidFill>
-                  <a:srgbClr val="1F2937"/>
-                </a:solidFill>
-                <a:latin typeface="Calibri" pitchFamily="34" charset="0"/>
-                <a:ea typeface="Calibri" pitchFamily="34" charset="-122"/>
-                <a:cs typeface="Calibri" pitchFamily="34" charset="-120"/>
-              </a:rPr>
-              <a:t>Final wager round</a:t>
-            </a:r>
-            <a:endParaRPr lang="en-US" sz="1400" dirty="0"/>
-          </a:p>
-        </p:txBody>
-      </p:sp>
-      <p:sp>
-        <p:nvSpPr>
-          <p:cNvPr id="9" name="Text 5"/>
+          <p:cNvPr id="7" name="Text 3"/>
           <p:cNvSpPr/>
           <p:nvPr/>
         </p:nvSpPr>
@@ -4170,7 +4077,7 @@
       </p:sp>
       <p:pic>
         <p:nvPicPr>
-          <p:cNvPr id="10" name="Image 1" descr="/Users/pop7/Library/CloudStorage/OneDrive-MonsterConnectCo.,Ltd/Lecture/KOSEN69 - software-security/slides/pptx/assets/logo-small.png">    </p:cNvPr>
+          <p:cNvPr id="8" name="Image 1" descr="/Users/pop7/Library/CloudStorage/OneDrive-MonsterConnectCo.,Ltd/Lecture/KOSEN69 - software-security/slides/pptx/assets/logo-small.png">    </p:cNvPr>
           <p:cNvPicPr>
             <a:picLocks noChangeAspect="1"/>
           </p:cNvPicPr>
